--- a/.lessons/64 Backend Coupon System Setup/2 Coupon - Working with create coupon/1.pptx
+++ b/.lessons/64 Backend Coupon System Setup/2 Coupon - Working with create coupon/1.pptx
@@ -9,7 +9,29 @@
     <p:sldId id="416" r:id="rId3"/>
     <p:sldId id="417" r:id="rId4"/>
     <p:sldId id="418" r:id="rId5"/>
-    <p:sldId id="419" r:id="rId6"/>
+    <p:sldId id="420" r:id="rId6"/>
+    <p:sldId id="421" r:id="rId7"/>
+    <p:sldId id="422" r:id="rId8"/>
+    <p:sldId id="425" r:id="rId9"/>
+    <p:sldId id="427" r:id="rId10"/>
+    <p:sldId id="419" r:id="rId11"/>
+    <p:sldId id="423" r:id="rId12"/>
+    <p:sldId id="424" r:id="rId13"/>
+    <p:sldId id="426" r:id="rId14"/>
+    <p:sldId id="428" r:id="rId15"/>
+    <p:sldId id="429" r:id="rId16"/>
+    <p:sldId id="431" r:id="rId17"/>
+    <p:sldId id="435" r:id="rId18"/>
+    <p:sldId id="432" r:id="rId19"/>
+    <p:sldId id="433" r:id="rId20"/>
+    <p:sldId id="434" r:id="rId21"/>
+    <p:sldId id="430" r:id="rId22"/>
+    <p:sldId id="436" r:id="rId23"/>
+    <p:sldId id="438" r:id="rId24"/>
+    <p:sldId id="439" r:id="rId25"/>
+    <p:sldId id="437" r:id="rId26"/>
+    <p:sldId id="440" r:id="rId27"/>
+    <p:sldId id="441" r:id="rId28"/>
   </p:sldIdLst>
   <p:sldSz cx="12192000" cy="6858000"/>
   <p:notesSz cx="6858000" cy="9144000"/>
@@ -263,7 +285,7 @@
           <a:p>
             <a:fld id="{3E102D2E-813C-461C-9963-687A650C48C0}" type="datetimeFigureOut">
               <a:rPr lang="en-US" smtClean="0"/>
-              <a:t>12/24/2025</a:t>
+              <a:t>12/30/2025</a:t>
             </a:fld>
             <a:endParaRPr lang="en-US"/>
           </a:p>
@@ -461,7 +483,7 @@
           <a:p>
             <a:fld id="{3E102D2E-813C-461C-9963-687A650C48C0}" type="datetimeFigureOut">
               <a:rPr lang="en-US" smtClean="0"/>
-              <a:t>12/24/2025</a:t>
+              <a:t>12/30/2025</a:t>
             </a:fld>
             <a:endParaRPr lang="en-US"/>
           </a:p>
@@ -669,7 +691,7 @@
           <a:p>
             <a:fld id="{3E102D2E-813C-461C-9963-687A650C48C0}" type="datetimeFigureOut">
               <a:rPr lang="en-US" smtClean="0"/>
-              <a:t>12/24/2025</a:t>
+              <a:t>12/30/2025</a:t>
             </a:fld>
             <a:endParaRPr lang="en-US"/>
           </a:p>
@@ -867,7 +889,7 @@
           <a:p>
             <a:fld id="{3E102D2E-813C-461C-9963-687A650C48C0}" type="datetimeFigureOut">
               <a:rPr lang="en-US" smtClean="0"/>
-              <a:t>12/24/2025</a:t>
+              <a:t>12/30/2025</a:t>
             </a:fld>
             <a:endParaRPr lang="en-US"/>
           </a:p>
@@ -1142,7 +1164,7 @@
           <a:p>
             <a:fld id="{3E102D2E-813C-461C-9963-687A650C48C0}" type="datetimeFigureOut">
               <a:rPr lang="en-US" smtClean="0"/>
-              <a:t>12/24/2025</a:t>
+              <a:t>12/30/2025</a:t>
             </a:fld>
             <a:endParaRPr lang="en-US"/>
           </a:p>
@@ -1407,7 +1429,7 @@
           <a:p>
             <a:fld id="{3E102D2E-813C-461C-9963-687A650C48C0}" type="datetimeFigureOut">
               <a:rPr lang="en-US" smtClean="0"/>
-              <a:t>12/24/2025</a:t>
+              <a:t>12/30/2025</a:t>
             </a:fld>
             <a:endParaRPr lang="en-US"/>
           </a:p>
@@ -1819,7 +1841,7 @@
           <a:p>
             <a:fld id="{3E102D2E-813C-461C-9963-687A650C48C0}" type="datetimeFigureOut">
               <a:rPr lang="en-US" smtClean="0"/>
-              <a:t>12/24/2025</a:t>
+              <a:t>12/30/2025</a:t>
             </a:fld>
             <a:endParaRPr lang="en-US"/>
           </a:p>
@@ -1960,7 +1982,7 @@
           <a:p>
             <a:fld id="{3E102D2E-813C-461C-9963-687A650C48C0}" type="datetimeFigureOut">
               <a:rPr lang="en-US" smtClean="0"/>
-              <a:t>12/24/2025</a:t>
+              <a:t>12/30/2025</a:t>
             </a:fld>
             <a:endParaRPr lang="en-US"/>
           </a:p>
@@ -2073,7 +2095,7 @@
           <a:p>
             <a:fld id="{3E102D2E-813C-461C-9963-687A650C48C0}" type="datetimeFigureOut">
               <a:rPr lang="en-US" smtClean="0"/>
-              <a:t>12/24/2025</a:t>
+              <a:t>12/30/2025</a:t>
             </a:fld>
             <a:endParaRPr lang="en-US"/>
           </a:p>
@@ -2384,7 +2406,7 @@
           <a:p>
             <a:fld id="{3E102D2E-813C-461C-9963-687A650C48C0}" type="datetimeFigureOut">
               <a:rPr lang="en-US" smtClean="0"/>
-              <a:t>12/24/2025</a:t>
+              <a:t>12/30/2025</a:t>
             </a:fld>
             <a:endParaRPr lang="en-US"/>
           </a:p>
@@ -2672,7 +2694,7 @@
           <a:p>
             <a:fld id="{3E102D2E-813C-461C-9963-687A650C48C0}" type="datetimeFigureOut">
               <a:rPr lang="en-US" smtClean="0"/>
-              <a:t>12/24/2025</a:t>
+              <a:t>12/30/2025</a:t>
             </a:fld>
             <a:endParaRPr lang="en-US"/>
           </a:p>
@@ -2913,7 +2935,7 @@
           <a:p>
             <a:fld id="{3E102D2E-813C-461C-9963-687A650C48C0}" type="datetimeFigureOut">
               <a:rPr lang="en-US" smtClean="0"/>
-              <a:t>12/24/2025</a:t>
+              <a:t>12/30/2025</a:t>
             </a:fld>
             <a:endParaRPr lang="en-US"/>
           </a:p>
@@ -3386,10 +3408,1260 @@
           </a:p>
         </p:txBody>
       </p:sp>
+      <p:pic>
+        <p:nvPicPr>
+          <p:cNvPr id="4" name="Picture 3">
+            <a:extLst>
+              <a:ext uri="{FF2B5EF4-FFF2-40B4-BE49-F238E27FC236}">
+                <a16:creationId xmlns:a16="http://schemas.microsoft.com/office/drawing/2014/main" id="{DF8CF4E7-2EBC-1D0E-817C-3FF9A40712E8}"/>
+              </a:ext>
+            </a:extLst>
+          </p:cNvPr>
+          <p:cNvPicPr>
+            <a:picLocks noChangeAspect="1"/>
+          </p:cNvPicPr>
+          <p:nvPr/>
+        </p:nvPicPr>
+        <p:blipFill>
+          <a:blip r:embed="rId2"/>
+          <a:stretch>
+            <a:fillRect/>
+          </a:stretch>
+        </p:blipFill>
+        <p:spPr>
+          <a:xfrm>
+            <a:off x="2473370" y="0"/>
+            <a:ext cx="7245259" cy="6858000"/>
+          </a:xfrm>
+          <a:prstGeom prst="rect">
+            <a:avLst/>
+          </a:prstGeom>
+        </p:spPr>
+      </p:pic>
     </p:spTree>
     <p:extLst>
       <p:ext uri="{BB962C8B-B14F-4D97-AF65-F5344CB8AC3E}">
         <p14:creationId xmlns:p14="http://schemas.microsoft.com/office/powerpoint/2010/main" val="3737127349"/>
+      </p:ext>
+    </p:extLst>
+  </p:cSld>
+  <p:clrMapOvr>
+    <a:masterClrMapping/>
+  </p:clrMapOvr>
+</p:sld>
+</file>
+
+<file path=ppt/slides/slide10.xml><?xml version="1.0" encoding="utf-8"?>
+<p:sld xmlns:a="http://schemas.openxmlformats.org/drawingml/2006/main" xmlns:r="http://schemas.openxmlformats.org/officeDocument/2006/relationships" xmlns:p="http://schemas.openxmlformats.org/presentationml/2006/main">
+  <p:cSld>
+    <p:spTree>
+      <p:nvGrpSpPr>
+        <p:cNvPr id="1" name="">
+          <a:extLst>
+            <a:ext uri="{FF2B5EF4-FFF2-40B4-BE49-F238E27FC236}">
+              <a16:creationId xmlns:a16="http://schemas.microsoft.com/office/drawing/2014/main" id="{234FC578-E916-157D-9E34-98C92603E544}"/>
+            </a:ext>
+          </a:extLst>
+        </p:cNvPr>
+        <p:cNvGrpSpPr/>
+        <p:nvPr/>
+      </p:nvGrpSpPr>
+      <p:grpSpPr>
+        <a:xfrm>
+          <a:off x="0" y="0"/>
+          <a:ext cx="0" cy="0"/>
+          <a:chOff x="0" y="0"/>
+          <a:chExt cx="0" cy="0"/>
+        </a:xfrm>
+      </p:grpSpPr>
+      <p:sp>
+        <p:nvSpPr>
+          <p:cNvPr id="3" name="TextBox 2">
+            <a:extLst>
+              <a:ext uri="{FF2B5EF4-FFF2-40B4-BE49-F238E27FC236}">
+                <a16:creationId xmlns:a16="http://schemas.microsoft.com/office/drawing/2014/main" id="{44E910EB-F8CF-72DB-1654-E9E111A3D87E}"/>
+              </a:ext>
+            </a:extLst>
+          </p:cNvPr>
+          <p:cNvSpPr txBox="1"/>
+          <p:nvPr/>
+        </p:nvSpPr>
+        <p:spPr>
+          <a:xfrm>
+            <a:off x="0" y="0"/>
+            <a:ext cx="12192000" cy="355354"/>
+          </a:xfrm>
+          <a:prstGeom prst="rect">
+            <a:avLst/>
+          </a:prstGeom>
+          <a:noFill/>
+        </p:spPr>
+        <p:txBody>
+          <a:bodyPr wrap="square">
+            <a:spAutoFit/>
+          </a:bodyPr>
+          <a:lstStyle/>
+          <a:p>
+            <a:pPr>
+              <a:lnSpc>
+                <a:spcPct val="150000"/>
+              </a:lnSpc>
+              <a:buNone/>
+            </a:pPr>
+            <a:r>
+              <a:rPr kumimoji="0" lang="en-US" altLang="en-US" sz="1300" b="0" i="0" u="none" strike="noStrike" cap="none" normalizeH="0" baseline="0">
+                <a:ln>
+                  <a:noFill/>
+                </a:ln>
+                <a:solidFill>
+                  <a:schemeClr val="tx1"/>
+                </a:solidFill>
+                <a:effectLst/>
+                <a:latin typeface="Arial" panose="020B0604020202020204" pitchFamily="34" charset="0"/>
+              </a:rPr>
+              <a:t>.</a:t>
+            </a:r>
+          </a:p>
+        </p:txBody>
+      </p:sp>
+      <p:pic>
+        <p:nvPicPr>
+          <p:cNvPr id="4" name="Picture 3">
+            <a:extLst>
+              <a:ext uri="{FF2B5EF4-FFF2-40B4-BE49-F238E27FC236}">
+                <a16:creationId xmlns:a16="http://schemas.microsoft.com/office/drawing/2014/main" id="{8F2FBB35-C784-70DD-01B2-1810F71D10FD}"/>
+              </a:ext>
+            </a:extLst>
+          </p:cNvPr>
+          <p:cNvPicPr>
+            <a:picLocks noChangeAspect="1"/>
+          </p:cNvPicPr>
+          <p:nvPr/>
+        </p:nvPicPr>
+        <p:blipFill>
+          <a:blip r:embed="rId2"/>
+          <a:stretch>
+            <a:fillRect/>
+          </a:stretch>
+        </p:blipFill>
+        <p:spPr>
+          <a:xfrm>
+            <a:off x="0" y="1070227"/>
+            <a:ext cx="12192000" cy="4717545"/>
+          </a:xfrm>
+          <a:prstGeom prst="rect">
+            <a:avLst/>
+          </a:prstGeom>
+          <a:solidFill>
+            <a:srgbClr val="FFFFFF">
+              <a:shade val="85000"/>
+            </a:srgbClr>
+          </a:solidFill>
+          <a:ln w="88900" cap="sq">
+            <a:solidFill>
+              <a:srgbClr val="FFFFFF"/>
+            </a:solidFill>
+            <a:miter lim="800000"/>
+          </a:ln>
+          <a:effectLst>
+            <a:outerShdw blurRad="55000" dist="18000" dir="5400000" algn="tl" rotWithShape="0">
+              <a:srgbClr val="000000">
+                <a:alpha val="40000"/>
+              </a:srgbClr>
+            </a:outerShdw>
+          </a:effectLst>
+          <a:scene3d>
+            <a:camera prst="orthographicFront"/>
+            <a:lightRig rig="twoPt" dir="t">
+              <a:rot lat="0" lon="0" rev="7200000"/>
+            </a:lightRig>
+          </a:scene3d>
+          <a:sp3d>
+            <a:bevelT w="25400" h="19050"/>
+            <a:contourClr>
+              <a:srgbClr val="FFFFFF"/>
+            </a:contourClr>
+          </a:sp3d>
+        </p:spPr>
+      </p:pic>
+    </p:spTree>
+    <p:extLst>
+      <p:ext uri="{BB962C8B-B14F-4D97-AF65-F5344CB8AC3E}">
+        <p14:creationId xmlns:p14="http://schemas.microsoft.com/office/powerpoint/2010/main" val="616314994"/>
+      </p:ext>
+    </p:extLst>
+  </p:cSld>
+  <p:clrMapOvr>
+    <a:masterClrMapping/>
+  </p:clrMapOvr>
+</p:sld>
+</file>
+
+<file path=ppt/slides/slide11.xml><?xml version="1.0" encoding="utf-8"?>
+<p:sld xmlns:a="http://schemas.openxmlformats.org/drawingml/2006/main" xmlns:r="http://schemas.openxmlformats.org/officeDocument/2006/relationships" xmlns:p="http://schemas.openxmlformats.org/presentationml/2006/main">
+  <p:cSld>
+    <p:spTree>
+      <p:nvGrpSpPr>
+        <p:cNvPr id="1" name="">
+          <a:extLst>
+            <a:ext uri="{FF2B5EF4-FFF2-40B4-BE49-F238E27FC236}">
+              <a16:creationId xmlns:a16="http://schemas.microsoft.com/office/drawing/2014/main" id="{39D3ACA8-F157-1B3B-C3DB-1F8F5334B868}"/>
+            </a:ext>
+          </a:extLst>
+        </p:cNvPr>
+        <p:cNvGrpSpPr/>
+        <p:nvPr/>
+      </p:nvGrpSpPr>
+      <p:grpSpPr>
+        <a:xfrm>
+          <a:off x="0" y="0"/>
+          <a:ext cx="0" cy="0"/>
+          <a:chOff x="0" y="0"/>
+          <a:chExt cx="0" cy="0"/>
+        </a:xfrm>
+      </p:grpSpPr>
+      <p:sp>
+        <p:nvSpPr>
+          <p:cNvPr id="3" name="TextBox 2">
+            <a:extLst>
+              <a:ext uri="{FF2B5EF4-FFF2-40B4-BE49-F238E27FC236}">
+                <a16:creationId xmlns:a16="http://schemas.microsoft.com/office/drawing/2014/main" id="{5909F6ED-AD04-F8AA-BC6E-BD2475085FEE}"/>
+              </a:ext>
+            </a:extLst>
+          </p:cNvPr>
+          <p:cNvSpPr txBox="1"/>
+          <p:nvPr/>
+        </p:nvSpPr>
+        <p:spPr>
+          <a:xfrm>
+            <a:off x="0" y="0"/>
+            <a:ext cx="12192000" cy="355354"/>
+          </a:xfrm>
+          <a:prstGeom prst="rect">
+            <a:avLst/>
+          </a:prstGeom>
+          <a:noFill/>
+        </p:spPr>
+        <p:txBody>
+          <a:bodyPr wrap="square">
+            <a:spAutoFit/>
+          </a:bodyPr>
+          <a:lstStyle/>
+          <a:p>
+            <a:pPr>
+              <a:lnSpc>
+                <a:spcPct val="150000"/>
+              </a:lnSpc>
+              <a:buNone/>
+            </a:pPr>
+            <a:r>
+              <a:rPr kumimoji="0" lang="en-US" altLang="en-US" sz="1300" b="0" i="0" u="none" strike="noStrike" cap="none" normalizeH="0" baseline="0">
+                <a:ln>
+                  <a:noFill/>
+                </a:ln>
+                <a:solidFill>
+                  <a:schemeClr val="tx1"/>
+                </a:solidFill>
+                <a:effectLst/>
+                <a:latin typeface="Arial" panose="020B0604020202020204" pitchFamily="34" charset="0"/>
+              </a:rPr>
+              <a:t>.</a:t>
+            </a:r>
+          </a:p>
+        </p:txBody>
+      </p:sp>
+      <p:pic>
+        <p:nvPicPr>
+          <p:cNvPr id="6" name="Picture 5">
+            <a:extLst>
+              <a:ext uri="{FF2B5EF4-FFF2-40B4-BE49-F238E27FC236}">
+                <a16:creationId xmlns:a16="http://schemas.microsoft.com/office/drawing/2014/main" id="{0E30B20A-BE7B-EF33-3F9F-C5A238E81557}"/>
+              </a:ext>
+            </a:extLst>
+          </p:cNvPr>
+          <p:cNvPicPr>
+            <a:picLocks noChangeAspect="1"/>
+          </p:cNvPicPr>
+          <p:nvPr/>
+        </p:nvPicPr>
+        <p:blipFill>
+          <a:blip r:embed="rId2"/>
+          <a:stretch>
+            <a:fillRect/>
+          </a:stretch>
+        </p:blipFill>
+        <p:spPr>
+          <a:xfrm>
+            <a:off x="676421" y="0"/>
+            <a:ext cx="10839157" cy="6858000"/>
+          </a:xfrm>
+          <a:prstGeom prst="rect">
+            <a:avLst/>
+          </a:prstGeom>
+        </p:spPr>
+      </p:pic>
+    </p:spTree>
+    <p:extLst>
+      <p:ext uri="{BB962C8B-B14F-4D97-AF65-F5344CB8AC3E}">
+        <p14:creationId xmlns:p14="http://schemas.microsoft.com/office/powerpoint/2010/main" val="1572101356"/>
+      </p:ext>
+    </p:extLst>
+  </p:cSld>
+  <p:clrMapOvr>
+    <a:masterClrMapping/>
+  </p:clrMapOvr>
+</p:sld>
+</file>
+
+<file path=ppt/slides/slide12.xml><?xml version="1.0" encoding="utf-8"?>
+<p:sld xmlns:a="http://schemas.openxmlformats.org/drawingml/2006/main" xmlns:r="http://schemas.openxmlformats.org/officeDocument/2006/relationships" xmlns:p="http://schemas.openxmlformats.org/presentationml/2006/main">
+  <p:cSld>
+    <p:spTree>
+      <p:nvGrpSpPr>
+        <p:cNvPr id="1" name="">
+          <a:extLst>
+            <a:ext uri="{FF2B5EF4-FFF2-40B4-BE49-F238E27FC236}">
+              <a16:creationId xmlns:a16="http://schemas.microsoft.com/office/drawing/2014/main" id="{31D04320-7925-DB81-0E96-F8B5FF84471E}"/>
+            </a:ext>
+          </a:extLst>
+        </p:cNvPr>
+        <p:cNvGrpSpPr/>
+        <p:nvPr/>
+      </p:nvGrpSpPr>
+      <p:grpSpPr>
+        <a:xfrm>
+          <a:off x="0" y="0"/>
+          <a:ext cx="0" cy="0"/>
+          <a:chOff x="0" y="0"/>
+          <a:chExt cx="0" cy="0"/>
+        </a:xfrm>
+      </p:grpSpPr>
+      <p:sp>
+        <p:nvSpPr>
+          <p:cNvPr id="3" name="TextBox 2">
+            <a:extLst>
+              <a:ext uri="{FF2B5EF4-FFF2-40B4-BE49-F238E27FC236}">
+                <a16:creationId xmlns:a16="http://schemas.microsoft.com/office/drawing/2014/main" id="{C46DABA6-44E6-4065-B10F-513EA08D2E4A}"/>
+              </a:ext>
+            </a:extLst>
+          </p:cNvPr>
+          <p:cNvSpPr txBox="1"/>
+          <p:nvPr/>
+        </p:nvSpPr>
+        <p:spPr>
+          <a:xfrm>
+            <a:off x="0" y="0"/>
+            <a:ext cx="12192000" cy="355354"/>
+          </a:xfrm>
+          <a:prstGeom prst="rect">
+            <a:avLst/>
+          </a:prstGeom>
+          <a:noFill/>
+        </p:spPr>
+        <p:txBody>
+          <a:bodyPr wrap="square">
+            <a:spAutoFit/>
+          </a:bodyPr>
+          <a:lstStyle/>
+          <a:p>
+            <a:pPr>
+              <a:lnSpc>
+                <a:spcPct val="150000"/>
+              </a:lnSpc>
+              <a:buNone/>
+            </a:pPr>
+            <a:r>
+              <a:rPr kumimoji="0" lang="en-US" altLang="en-US" sz="1300" b="0" i="0" u="none" strike="noStrike" cap="none" normalizeH="0" baseline="0">
+                <a:ln>
+                  <a:noFill/>
+                </a:ln>
+                <a:solidFill>
+                  <a:schemeClr val="tx1"/>
+                </a:solidFill>
+                <a:effectLst/>
+                <a:latin typeface="Arial" panose="020B0604020202020204" pitchFamily="34" charset="0"/>
+              </a:rPr>
+              <a:t>.</a:t>
+            </a:r>
+          </a:p>
+        </p:txBody>
+      </p:sp>
+      <p:pic>
+        <p:nvPicPr>
+          <p:cNvPr id="4" name="Picture 3">
+            <a:extLst>
+              <a:ext uri="{FF2B5EF4-FFF2-40B4-BE49-F238E27FC236}">
+                <a16:creationId xmlns:a16="http://schemas.microsoft.com/office/drawing/2014/main" id="{04912961-0869-A31C-BFA6-93CA7491AB45}"/>
+              </a:ext>
+            </a:extLst>
+          </p:cNvPr>
+          <p:cNvPicPr>
+            <a:picLocks noChangeAspect="1"/>
+          </p:cNvPicPr>
+          <p:nvPr/>
+        </p:nvPicPr>
+        <p:blipFill>
+          <a:blip r:embed="rId2"/>
+          <a:stretch>
+            <a:fillRect/>
+          </a:stretch>
+        </p:blipFill>
+        <p:spPr>
+          <a:xfrm>
+            <a:off x="2905906" y="0"/>
+            <a:ext cx="6380188" cy="6858000"/>
+          </a:xfrm>
+          <a:prstGeom prst="rect">
+            <a:avLst/>
+          </a:prstGeom>
+        </p:spPr>
+      </p:pic>
+    </p:spTree>
+    <p:extLst>
+      <p:ext uri="{BB962C8B-B14F-4D97-AF65-F5344CB8AC3E}">
+        <p14:creationId xmlns:p14="http://schemas.microsoft.com/office/powerpoint/2010/main" val="1694377051"/>
+      </p:ext>
+    </p:extLst>
+  </p:cSld>
+  <p:clrMapOvr>
+    <a:masterClrMapping/>
+  </p:clrMapOvr>
+</p:sld>
+</file>
+
+<file path=ppt/slides/slide13.xml><?xml version="1.0" encoding="utf-8"?>
+<p:sld xmlns:a="http://schemas.openxmlformats.org/drawingml/2006/main" xmlns:r="http://schemas.openxmlformats.org/officeDocument/2006/relationships" xmlns:p="http://schemas.openxmlformats.org/presentationml/2006/main">
+  <p:cSld>
+    <p:spTree>
+      <p:nvGrpSpPr>
+        <p:cNvPr id="1" name="">
+          <a:extLst>
+            <a:ext uri="{FF2B5EF4-FFF2-40B4-BE49-F238E27FC236}">
+              <a16:creationId xmlns:a16="http://schemas.microsoft.com/office/drawing/2014/main" id="{06053FD7-B27C-F641-C3B8-5BBD2F8C537A}"/>
+            </a:ext>
+          </a:extLst>
+        </p:cNvPr>
+        <p:cNvGrpSpPr/>
+        <p:nvPr/>
+      </p:nvGrpSpPr>
+      <p:grpSpPr>
+        <a:xfrm>
+          <a:off x="0" y="0"/>
+          <a:ext cx="0" cy="0"/>
+          <a:chOff x="0" y="0"/>
+          <a:chExt cx="0" cy="0"/>
+        </a:xfrm>
+      </p:grpSpPr>
+      <p:sp>
+        <p:nvSpPr>
+          <p:cNvPr id="3" name="TextBox 2">
+            <a:extLst>
+              <a:ext uri="{FF2B5EF4-FFF2-40B4-BE49-F238E27FC236}">
+                <a16:creationId xmlns:a16="http://schemas.microsoft.com/office/drawing/2014/main" id="{091CAF95-954C-2517-3FE9-4D338DF37255}"/>
+              </a:ext>
+            </a:extLst>
+          </p:cNvPr>
+          <p:cNvSpPr txBox="1"/>
+          <p:nvPr/>
+        </p:nvSpPr>
+        <p:spPr>
+          <a:xfrm>
+            <a:off x="0" y="0"/>
+            <a:ext cx="12192000" cy="355354"/>
+          </a:xfrm>
+          <a:prstGeom prst="rect">
+            <a:avLst/>
+          </a:prstGeom>
+          <a:noFill/>
+        </p:spPr>
+        <p:txBody>
+          <a:bodyPr wrap="square">
+            <a:spAutoFit/>
+          </a:bodyPr>
+          <a:lstStyle/>
+          <a:p>
+            <a:pPr>
+              <a:lnSpc>
+                <a:spcPct val="150000"/>
+              </a:lnSpc>
+              <a:buNone/>
+            </a:pPr>
+            <a:r>
+              <a:rPr kumimoji="0" lang="en-US" altLang="en-US" sz="1300" b="0" i="0" u="none" strike="noStrike" cap="none" normalizeH="0" baseline="0">
+                <a:ln>
+                  <a:noFill/>
+                </a:ln>
+                <a:solidFill>
+                  <a:schemeClr val="tx1"/>
+                </a:solidFill>
+                <a:effectLst/>
+                <a:latin typeface="Arial" panose="020B0604020202020204" pitchFamily="34" charset="0"/>
+              </a:rPr>
+              <a:t>.</a:t>
+            </a:r>
+          </a:p>
+        </p:txBody>
+      </p:sp>
+      <p:pic>
+        <p:nvPicPr>
+          <p:cNvPr id="4" name="Picture 3">
+            <a:extLst>
+              <a:ext uri="{FF2B5EF4-FFF2-40B4-BE49-F238E27FC236}">
+                <a16:creationId xmlns:a16="http://schemas.microsoft.com/office/drawing/2014/main" id="{017F606D-9484-45FB-01B3-27A9D85607AC}"/>
+              </a:ext>
+            </a:extLst>
+          </p:cNvPr>
+          <p:cNvPicPr>
+            <a:picLocks noChangeAspect="1"/>
+          </p:cNvPicPr>
+          <p:nvPr/>
+        </p:nvPicPr>
+        <p:blipFill>
+          <a:blip r:embed="rId2"/>
+          <a:stretch>
+            <a:fillRect/>
+          </a:stretch>
+        </p:blipFill>
+        <p:spPr>
+          <a:xfrm>
+            <a:off x="0" y="26096"/>
+            <a:ext cx="12192000" cy="6805808"/>
+          </a:xfrm>
+          <a:prstGeom prst="rect">
+            <a:avLst/>
+          </a:prstGeom>
+        </p:spPr>
+      </p:pic>
+    </p:spTree>
+    <p:extLst>
+      <p:ext uri="{BB962C8B-B14F-4D97-AF65-F5344CB8AC3E}">
+        <p14:creationId xmlns:p14="http://schemas.microsoft.com/office/powerpoint/2010/main" val="201332346"/>
+      </p:ext>
+    </p:extLst>
+  </p:cSld>
+  <p:clrMapOvr>
+    <a:masterClrMapping/>
+  </p:clrMapOvr>
+</p:sld>
+</file>
+
+<file path=ppt/slides/slide14.xml><?xml version="1.0" encoding="utf-8"?>
+<p:sld xmlns:a="http://schemas.openxmlformats.org/drawingml/2006/main" xmlns:r="http://schemas.openxmlformats.org/officeDocument/2006/relationships" xmlns:p="http://schemas.openxmlformats.org/presentationml/2006/main">
+  <p:cSld>
+    <p:spTree>
+      <p:nvGrpSpPr>
+        <p:cNvPr id="1" name="">
+          <a:extLst>
+            <a:ext uri="{FF2B5EF4-FFF2-40B4-BE49-F238E27FC236}">
+              <a16:creationId xmlns:a16="http://schemas.microsoft.com/office/drawing/2014/main" id="{9BCF1B1B-A892-6E2E-EED7-A33F9FD42947}"/>
+            </a:ext>
+          </a:extLst>
+        </p:cNvPr>
+        <p:cNvGrpSpPr/>
+        <p:nvPr/>
+      </p:nvGrpSpPr>
+      <p:grpSpPr>
+        <a:xfrm>
+          <a:off x="0" y="0"/>
+          <a:ext cx="0" cy="0"/>
+          <a:chOff x="0" y="0"/>
+          <a:chExt cx="0" cy="0"/>
+        </a:xfrm>
+      </p:grpSpPr>
+      <p:sp>
+        <p:nvSpPr>
+          <p:cNvPr id="3" name="TextBox 2">
+            <a:extLst>
+              <a:ext uri="{FF2B5EF4-FFF2-40B4-BE49-F238E27FC236}">
+                <a16:creationId xmlns:a16="http://schemas.microsoft.com/office/drawing/2014/main" id="{43B7FDBA-C1B4-2F99-AD34-903F16E97DDD}"/>
+              </a:ext>
+            </a:extLst>
+          </p:cNvPr>
+          <p:cNvSpPr txBox="1"/>
+          <p:nvPr/>
+        </p:nvSpPr>
+        <p:spPr>
+          <a:xfrm>
+            <a:off x="0" y="0"/>
+            <a:ext cx="12192000" cy="355354"/>
+          </a:xfrm>
+          <a:prstGeom prst="rect">
+            <a:avLst/>
+          </a:prstGeom>
+          <a:noFill/>
+        </p:spPr>
+        <p:txBody>
+          <a:bodyPr wrap="square">
+            <a:spAutoFit/>
+          </a:bodyPr>
+          <a:lstStyle/>
+          <a:p>
+            <a:pPr>
+              <a:lnSpc>
+                <a:spcPct val="150000"/>
+              </a:lnSpc>
+              <a:buNone/>
+            </a:pPr>
+            <a:r>
+              <a:rPr kumimoji="0" lang="en-US" altLang="en-US" sz="1300" b="0" i="0" u="none" strike="noStrike" cap="none" normalizeH="0" baseline="0">
+                <a:ln>
+                  <a:noFill/>
+                </a:ln>
+                <a:solidFill>
+                  <a:schemeClr val="tx1"/>
+                </a:solidFill>
+                <a:effectLst/>
+                <a:latin typeface="Arial" panose="020B0604020202020204" pitchFamily="34" charset="0"/>
+              </a:rPr>
+              <a:t>.</a:t>
+            </a:r>
+          </a:p>
+        </p:txBody>
+      </p:sp>
+      <p:pic>
+        <p:nvPicPr>
+          <p:cNvPr id="4" name="Picture 3">
+            <a:extLst>
+              <a:ext uri="{FF2B5EF4-FFF2-40B4-BE49-F238E27FC236}">
+                <a16:creationId xmlns:a16="http://schemas.microsoft.com/office/drawing/2014/main" id="{1BB3C911-DDF8-C304-2155-F9CF641D6C45}"/>
+              </a:ext>
+            </a:extLst>
+          </p:cNvPr>
+          <p:cNvPicPr>
+            <a:picLocks noChangeAspect="1"/>
+          </p:cNvPicPr>
+          <p:nvPr/>
+        </p:nvPicPr>
+        <p:blipFill>
+          <a:blip r:embed="rId2"/>
+          <a:stretch>
+            <a:fillRect/>
+          </a:stretch>
+        </p:blipFill>
+        <p:spPr>
+          <a:xfrm>
+            <a:off x="2339590" y="0"/>
+            <a:ext cx="7512820" cy="6858000"/>
+          </a:xfrm>
+          <a:prstGeom prst="rect">
+            <a:avLst/>
+          </a:prstGeom>
+        </p:spPr>
+      </p:pic>
+    </p:spTree>
+    <p:extLst>
+      <p:ext uri="{BB962C8B-B14F-4D97-AF65-F5344CB8AC3E}">
+        <p14:creationId xmlns:p14="http://schemas.microsoft.com/office/powerpoint/2010/main" val="437637422"/>
+      </p:ext>
+    </p:extLst>
+  </p:cSld>
+  <p:clrMapOvr>
+    <a:masterClrMapping/>
+  </p:clrMapOvr>
+</p:sld>
+</file>
+
+<file path=ppt/slides/slide15.xml><?xml version="1.0" encoding="utf-8"?>
+<p:sld xmlns:a="http://schemas.openxmlformats.org/drawingml/2006/main" xmlns:r="http://schemas.openxmlformats.org/officeDocument/2006/relationships" xmlns:p="http://schemas.openxmlformats.org/presentationml/2006/main">
+  <p:cSld>
+    <p:spTree>
+      <p:nvGrpSpPr>
+        <p:cNvPr id="1" name="">
+          <a:extLst>
+            <a:ext uri="{FF2B5EF4-FFF2-40B4-BE49-F238E27FC236}">
+              <a16:creationId xmlns:a16="http://schemas.microsoft.com/office/drawing/2014/main" id="{AF60F01E-6191-4B4D-67BE-4692D095E0AE}"/>
+            </a:ext>
+          </a:extLst>
+        </p:cNvPr>
+        <p:cNvGrpSpPr/>
+        <p:nvPr/>
+      </p:nvGrpSpPr>
+      <p:grpSpPr>
+        <a:xfrm>
+          <a:off x="0" y="0"/>
+          <a:ext cx="0" cy="0"/>
+          <a:chOff x="0" y="0"/>
+          <a:chExt cx="0" cy="0"/>
+        </a:xfrm>
+      </p:grpSpPr>
+      <p:sp>
+        <p:nvSpPr>
+          <p:cNvPr id="3" name="TextBox 2">
+            <a:extLst>
+              <a:ext uri="{FF2B5EF4-FFF2-40B4-BE49-F238E27FC236}">
+                <a16:creationId xmlns:a16="http://schemas.microsoft.com/office/drawing/2014/main" id="{E412C886-8768-7B68-BAC2-0228A9815B8D}"/>
+              </a:ext>
+            </a:extLst>
+          </p:cNvPr>
+          <p:cNvSpPr txBox="1"/>
+          <p:nvPr/>
+        </p:nvSpPr>
+        <p:spPr>
+          <a:xfrm>
+            <a:off x="0" y="0"/>
+            <a:ext cx="12192000" cy="355354"/>
+          </a:xfrm>
+          <a:prstGeom prst="rect">
+            <a:avLst/>
+          </a:prstGeom>
+          <a:noFill/>
+        </p:spPr>
+        <p:txBody>
+          <a:bodyPr wrap="square">
+            <a:spAutoFit/>
+          </a:bodyPr>
+          <a:lstStyle/>
+          <a:p>
+            <a:pPr>
+              <a:lnSpc>
+                <a:spcPct val="150000"/>
+              </a:lnSpc>
+              <a:buNone/>
+            </a:pPr>
+            <a:r>
+              <a:rPr kumimoji="0" lang="en-US" altLang="en-US" sz="1300" b="0" i="0" u="none" strike="noStrike" cap="none" normalizeH="0" baseline="0">
+                <a:ln>
+                  <a:noFill/>
+                </a:ln>
+                <a:solidFill>
+                  <a:schemeClr val="tx1"/>
+                </a:solidFill>
+                <a:effectLst/>
+                <a:latin typeface="Arial" panose="020B0604020202020204" pitchFamily="34" charset="0"/>
+              </a:rPr>
+              <a:t>.</a:t>
+            </a:r>
+          </a:p>
+        </p:txBody>
+      </p:sp>
+      <p:pic>
+        <p:nvPicPr>
+          <p:cNvPr id="4" name="Picture 3">
+            <a:extLst>
+              <a:ext uri="{FF2B5EF4-FFF2-40B4-BE49-F238E27FC236}">
+                <a16:creationId xmlns:a16="http://schemas.microsoft.com/office/drawing/2014/main" id="{AC72AD36-57D0-1899-C12E-C264756D7497}"/>
+              </a:ext>
+            </a:extLst>
+          </p:cNvPr>
+          <p:cNvPicPr>
+            <a:picLocks noChangeAspect="1"/>
+          </p:cNvPicPr>
+          <p:nvPr/>
+        </p:nvPicPr>
+        <p:blipFill>
+          <a:blip r:embed="rId2"/>
+          <a:stretch>
+            <a:fillRect/>
+          </a:stretch>
+        </p:blipFill>
+        <p:spPr>
+          <a:xfrm>
+            <a:off x="429016" y="0"/>
+            <a:ext cx="11333968" cy="6858000"/>
+          </a:xfrm>
+          <a:prstGeom prst="rect">
+            <a:avLst/>
+          </a:prstGeom>
+        </p:spPr>
+      </p:pic>
+    </p:spTree>
+    <p:extLst>
+      <p:ext uri="{BB962C8B-B14F-4D97-AF65-F5344CB8AC3E}">
+        <p14:creationId xmlns:p14="http://schemas.microsoft.com/office/powerpoint/2010/main" val="126001326"/>
+      </p:ext>
+    </p:extLst>
+  </p:cSld>
+  <p:clrMapOvr>
+    <a:masterClrMapping/>
+  </p:clrMapOvr>
+</p:sld>
+</file>
+
+<file path=ppt/slides/slide16.xml><?xml version="1.0" encoding="utf-8"?>
+<p:sld xmlns:a="http://schemas.openxmlformats.org/drawingml/2006/main" xmlns:r="http://schemas.openxmlformats.org/officeDocument/2006/relationships" xmlns:p="http://schemas.openxmlformats.org/presentationml/2006/main">
+  <p:cSld>
+    <p:spTree>
+      <p:nvGrpSpPr>
+        <p:cNvPr id="1" name="">
+          <a:extLst>
+            <a:ext uri="{FF2B5EF4-FFF2-40B4-BE49-F238E27FC236}">
+              <a16:creationId xmlns:a16="http://schemas.microsoft.com/office/drawing/2014/main" id="{756EAFC0-5563-E644-7D0F-EB017F9B5F91}"/>
+            </a:ext>
+          </a:extLst>
+        </p:cNvPr>
+        <p:cNvGrpSpPr/>
+        <p:nvPr/>
+      </p:nvGrpSpPr>
+      <p:grpSpPr>
+        <a:xfrm>
+          <a:off x="0" y="0"/>
+          <a:ext cx="0" cy="0"/>
+          <a:chOff x="0" y="0"/>
+          <a:chExt cx="0" cy="0"/>
+        </a:xfrm>
+      </p:grpSpPr>
+      <p:sp>
+        <p:nvSpPr>
+          <p:cNvPr id="3" name="TextBox 2">
+            <a:extLst>
+              <a:ext uri="{FF2B5EF4-FFF2-40B4-BE49-F238E27FC236}">
+                <a16:creationId xmlns:a16="http://schemas.microsoft.com/office/drawing/2014/main" id="{6D053266-EEBD-248E-A48D-3562DB3100DC}"/>
+              </a:ext>
+            </a:extLst>
+          </p:cNvPr>
+          <p:cNvSpPr txBox="1"/>
+          <p:nvPr/>
+        </p:nvSpPr>
+        <p:spPr>
+          <a:xfrm>
+            <a:off x="0" y="0"/>
+            <a:ext cx="12192000" cy="355354"/>
+          </a:xfrm>
+          <a:prstGeom prst="rect">
+            <a:avLst/>
+          </a:prstGeom>
+          <a:noFill/>
+        </p:spPr>
+        <p:txBody>
+          <a:bodyPr wrap="square">
+            <a:spAutoFit/>
+          </a:bodyPr>
+          <a:lstStyle/>
+          <a:p>
+            <a:pPr>
+              <a:lnSpc>
+                <a:spcPct val="150000"/>
+              </a:lnSpc>
+              <a:buNone/>
+            </a:pPr>
+            <a:r>
+              <a:rPr kumimoji="0" lang="en-US" altLang="en-US" sz="1300" b="0" i="0" u="none" strike="noStrike" cap="none" normalizeH="0" baseline="0">
+                <a:ln>
+                  <a:noFill/>
+                </a:ln>
+                <a:solidFill>
+                  <a:schemeClr val="tx1"/>
+                </a:solidFill>
+                <a:effectLst/>
+                <a:latin typeface="Arial" panose="020B0604020202020204" pitchFamily="34" charset="0"/>
+              </a:rPr>
+              <a:t>.</a:t>
+            </a:r>
+          </a:p>
+        </p:txBody>
+      </p:sp>
+      <p:pic>
+        <p:nvPicPr>
+          <p:cNvPr id="4" name="Picture 3">
+            <a:extLst>
+              <a:ext uri="{FF2B5EF4-FFF2-40B4-BE49-F238E27FC236}">
+                <a16:creationId xmlns:a16="http://schemas.microsoft.com/office/drawing/2014/main" id="{1AF9B50D-7664-FA17-88D3-0850A82BF5BA}"/>
+              </a:ext>
+            </a:extLst>
+          </p:cNvPr>
+          <p:cNvPicPr>
+            <a:picLocks noChangeAspect="1"/>
+          </p:cNvPicPr>
+          <p:nvPr/>
+        </p:nvPicPr>
+        <p:blipFill>
+          <a:blip r:embed="rId2"/>
+          <a:stretch>
+            <a:fillRect/>
+          </a:stretch>
+        </p:blipFill>
+        <p:spPr>
+          <a:xfrm>
+            <a:off x="0" y="1514843"/>
+            <a:ext cx="12192000" cy="3828313"/>
+          </a:xfrm>
+          <a:prstGeom prst="rect">
+            <a:avLst/>
+          </a:prstGeom>
+          <a:solidFill>
+            <a:srgbClr val="FFFFFF">
+              <a:shade val="85000"/>
+            </a:srgbClr>
+          </a:solidFill>
+          <a:ln w="88900" cap="sq">
+            <a:solidFill>
+              <a:srgbClr val="FFFFFF"/>
+            </a:solidFill>
+            <a:miter lim="800000"/>
+          </a:ln>
+          <a:effectLst>
+            <a:outerShdw blurRad="55000" dist="18000" dir="5400000" algn="tl" rotWithShape="0">
+              <a:srgbClr val="000000">
+                <a:alpha val="40000"/>
+              </a:srgbClr>
+            </a:outerShdw>
+          </a:effectLst>
+          <a:scene3d>
+            <a:camera prst="orthographicFront"/>
+            <a:lightRig rig="twoPt" dir="t">
+              <a:rot lat="0" lon="0" rev="7200000"/>
+            </a:lightRig>
+          </a:scene3d>
+          <a:sp3d>
+            <a:bevelT w="25400" h="19050"/>
+            <a:contourClr>
+              <a:srgbClr val="FFFFFF"/>
+            </a:contourClr>
+          </a:sp3d>
+        </p:spPr>
+      </p:pic>
+    </p:spTree>
+    <p:extLst>
+      <p:ext uri="{BB962C8B-B14F-4D97-AF65-F5344CB8AC3E}">
+        <p14:creationId xmlns:p14="http://schemas.microsoft.com/office/powerpoint/2010/main" val="3045054129"/>
+      </p:ext>
+    </p:extLst>
+  </p:cSld>
+  <p:clrMapOvr>
+    <a:masterClrMapping/>
+  </p:clrMapOvr>
+</p:sld>
+</file>
+
+<file path=ppt/slides/slide17.xml><?xml version="1.0" encoding="utf-8"?>
+<p:sld xmlns:a="http://schemas.openxmlformats.org/drawingml/2006/main" xmlns:r="http://schemas.openxmlformats.org/officeDocument/2006/relationships" xmlns:p="http://schemas.openxmlformats.org/presentationml/2006/main">
+  <p:cSld>
+    <p:spTree>
+      <p:nvGrpSpPr>
+        <p:cNvPr id="1" name="">
+          <a:extLst>
+            <a:ext uri="{FF2B5EF4-FFF2-40B4-BE49-F238E27FC236}">
+              <a16:creationId xmlns:a16="http://schemas.microsoft.com/office/drawing/2014/main" id="{AF72851C-C080-1BD5-2E11-E90134219BFA}"/>
+            </a:ext>
+          </a:extLst>
+        </p:cNvPr>
+        <p:cNvGrpSpPr/>
+        <p:nvPr/>
+      </p:nvGrpSpPr>
+      <p:grpSpPr>
+        <a:xfrm>
+          <a:off x="0" y="0"/>
+          <a:ext cx="0" cy="0"/>
+          <a:chOff x="0" y="0"/>
+          <a:chExt cx="0" cy="0"/>
+        </a:xfrm>
+      </p:grpSpPr>
+      <p:sp>
+        <p:nvSpPr>
+          <p:cNvPr id="3" name="TextBox 2">
+            <a:extLst>
+              <a:ext uri="{FF2B5EF4-FFF2-40B4-BE49-F238E27FC236}">
+                <a16:creationId xmlns:a16="http://schemas.microsoft.com/office/drawing/2014/main" id="{A04AC7B3-FF11-FF73-E68E-B6EED51C01BD}"/>
+              </a:ext>
+            </a:extLst>
+          </p:cNvPr>
+          <p:cNvSpPr txBox="1"/>
+          <p:nvPr/>
+        </p:nvSpPr>
+        <p:spPr>
+          <a:xfrm>
+            <a:off x="0" y="0"/>
+            <a:ext cx="12192000" cy="355354"/>
+          </a:xfrm>
+          <a:prstGeom prst="rect">
+            <a:avLst/>
+          </a:prstGeom>
+          <a:noFill/>
+        </p:spPr>
+        <p:txBody>
+          <a:bodyPr wrap="square">
+            <a:spAutoFit/>
+          </a:bodyPr>
+          <a:lstStyle/>
+          <a:p>
+            <a:pPr>
+              <a:lnSpc>
+                <a:spcPct val="150000"/>
+              </a:lnSpc>
+              <a:buNone/>
+            </a:pPr>
+            <a:r>
+              <a:rPr kumimoji="0" lang="en-US" altLang="en-US" sz="1300" b="0" i="0" u="none" strike="noStrike" cap="none" normalizeH="0" baseline="0">
+                <a:ln>
+                  <a:noFill/>
+                </a:ln>
+                <a:solidFill>
+                  <a:schemeClr val="tx1"/>
+                </a:solidFill>
+                <a:effectLst/>
+                <a:latin typeface="Arial" panose="020B0604020202020204" pitchFamily="34" charset="0"/>
+              </a:rPr>
+              <a:t>.</a:t>
+            </a:r>
+          </a:p>
+        </p:txBody>
+      </p:sp>
+      <p:pic>
+        <p:nvPicPr>
+          <p:cNvPr id="4" name="Picture 3">
+            <a:extLst>
+              <a:ext uri="{FF2B5EF4-FFF2-40B4-BE49-F238E27FC236}">
+                <a16:creationId xmlns:a16="http://schemas.microsoft.com/office/drawing/2014/main" id="{223A9241-08CD-2A4C-7359-895F45FB1F57}"/>
+              </a:ext>
+            </a:extLst>
+          </p:cNvPr>
+          <p:cNvPicPr>
+            <a:picLocks noChangeAspect="1"/>
+          </p:cNvPicPr>
+          <p:nvPr/>
+        </p:nvPicPr>
+        <p:blipFill>
+          <a:blip r:embed="rId2"/>
+          <a:stretch>
+            <a:fillRect/>
+          </a:stretch>
+        </p:blipFill>
+        <p:spPr>
+          <a:xfrm>
+            <a:off x="2740553" y="0"/>
+            <a:ext cx="6710893" cy="6858000"/>
+          </a:xfrm>
+          <a:prstGeom prst="rect">
+            <a:avLst/>
+          </a:prstGeom>
+        </p:spPr>
+      </p:pic>
+    </p:spTree>
+    <p:extLst>
+      <p:ext uri="{BB962C8B-B14F-4D97-AF65-F5344CB8AC3E}">
+        <p14:creationId xmlns:p14="http://schemas.microsoft.com/office/powerpoint/2010/main" val="471539788"/>
+      </p:ext>
+    </p:extLst>
+  </p:cSld>
+  <p:clrMapOvr>
+    <a:masterClrMapping/>
+  </p:clrMapOvr>
+</p:sld>
+</file>
+
+<file path=ppt/slides/slide18.xml><?xml version="1.0" encoding="utf-8"?>
+<p:sld xmlns:a="http://schemas.openxmlformats.org/drawingml/2006/main" xmlns:r="http://schemas.openxmlformats.org/officeDocument/2006/relationships" xmlns:p="http://schemas.openxmlformats.org/presentationml/2006/main">
+  <p:cSld>
+    <p:spTree>
+      <p:nvGrpSpPr>
+        <p:cNvPr id="1" name="">
+          <a:extLst>
+            <a:ext uri="{FF2B5EF4-FFF2-40B4-BE49-F238E27FC236}">
+              <a16:creationId xmlns:a16="http://schemas.microsoft.com/office/drawing/2014/main" id="{B73DF69A-5F46-F452-B389-8FF8C673B6E4}"/>
+            </a:ext>
+          </a:extLst>
+        </p:cNvPr>
+        <p:cNvGrpSpPr/>
+        <p:nvPr/>
+      </p:nvGrpSpPr>
+      <p:grpSpPr>
+        <a:xfrm>
+          <a:off x="0" y="0"/>
+          <a:ext cx="0" cy="0"/>
+          <a:chOff x="0" y="0"/>
+          <a:chExt cx="0" cy="0"/>
+        </a:xfrm>
+      </p:grpSpPr>
+      <p:sp>
+        <p:nvSpPr>
+          <p:cNvPr id="3" name="TextBox 2">
+            <a:extLst>
+              <a:ext uri="{FF2B5EF4-FFF2-40B4-BE49-F238E27FC236}">
+                <a16:creationId xmlns:a16="http://schemas.microsoft.com/office/drawing/2014/main" id="{332E3CE2-281E-2C91-70B8-9B37911A23EB}"/>
+              </a:ext>
+            </a:extLst>
+          </p:cNvPr>
+          <p:cNvSpPr txBox="1"/>
+          <p:nvPr/>
+        </p:nvSpPr>
+        <p:spPr>
+          <a:xfrm>
+            <a:off x="0" y="0"/>
+            <a:ext cx="12192000" cy="355354"/>
+          </a:xfrm>
+          <a:prstGeom prst="rect">
+            <a:avLst/>
+          </a:prstGeom>
+          <a:noFill/>
+        </p:spPr>
+        <p:txBody>
+          <a:bodyPr wrap="square">
+            <a:spAutoFit/>
+          </a:bodyPr>
+          <a:lstStyle/>
+          <a:p>
+            <a:pPr>
+              <a:lnSpc>
+                <a:spcPct val="150000"/>
+              </a:lnSpc>
+              <a:buNone/>
+            </a:pPr>
+            <a:r>
+              <a:rPr kumimoji="0" lang="en-US" altLang="en-US" sz="1300" b="0" i="0" u="none" strike="noStrike" cap="none" normalizeH="0" baseline="0">
+                <a:ln>
+                  <a:noFill/>
+                </a:ln>
+                <a:solidFill>
+                  <a:schemeClr val="tx1"/>
+                </a:solidFill>
+                <a:effectLst/>
+                <a:latin typeface="Arial" panose="020B0604020202020204" pitchFamily="34" charset="0"/>
+              </a:rPr>
+              <a:t>.</a:t>
+            </a:r>
+          </a:p>
+        </p:txBody>
+      </p:sp>
+      <p:pic>
+        <p:nvPicPr>
+          <p:cNvPr id="4" name="Picture 3">
+            <a:extLst>
+              <a:ext uri="{FF2B5EF4-FFF2-40B4-BE49-F238E27FC236}">
+                <a16:creationId xmlns:a16="http://schemas.microsoft.com/office/drawing/2014/main" id="{F596B65C-A05F-F432-3B17-F62CC6781882}"/>
+              </a:ext>
+            </a:extLst>
+          </p:cNvPr>
+          <p:cNvPicPr>
+            <a:picLocks noChangeAspect="1"/>
+          </p:cNvPicPr>
+          <p:nvPr/>
+        </p:nvPicPr>
+        <p:blipFill>
+          <a:blip r:embed="rId2"/>
+          <a:stretch>
+            <a:fillRect/>
+          </a:stretch>
+        </p:blipFill>
+        <p:spPr>
+          <a:xfrm>
+            <a:off x="2217009" y="0"/>
+            <a:ext cx="7757981" cy="6858000"/>
+          </a:xfrm>
+          <a:prstGeom prst="rect">
+            <a:avLst/>
+          </a:prstGeom>
+        </p:spPr>
+      </p:pic>
+    </p:spTree>
+    <p:extLst>
+      <p:ext uri="{BB962C8B-B14F-4D97-AF65-F5344CB8AC3E}">
+        <p14:creationId xmlns:p14="http://schemas.microsoft.com/office/powerpoint/2010/main" val="3762404513"/>
+      </p:ext>
+    </p:extLst>
+  </p:cSld>
+  <p:clrMapOvr>
+    <a:masterClrMapping/>
+  </p:clrMapOvr>
+</p:sld>
+</file>
+
+<file path=ppt/slides/slide19.xml><?xml version="1.0" encoding="utf-8"?>
+<p:sld xmlns:a="http://schemas.openxmlformats.org/drawingml/2006/main" xmlns:r="http://schemas.openxmlformats.org/officeDocument/2006/relationships" xmlns:p="http://schemas.openxmlformats.org/presentationml/2006/main">
+  <p:cSld>
+    <p:spTree>
+      <p:nvGrpSpPr>
+        <p:cNvPr id="1" name="">
+          <a:extLst>
+            <a:ext uri="{FF2B5EF4-FFF2-40B4-BE49-F238E27FC236}">
+              <a16:creationId xmlns:a16="http://schemas.microsoft.com/office/drawing/2014/main" id="{2AFFB28B-A22A-31C4-6913-0AAA7E013ADD}"/>
+            </a:ext>
+          </a:extLst>
+        </p:cNvPr>
+        <p:cNvGrpSpPr/>
+        <p:nvPr/>
+      </p:nvGrpSpPr>
+      <p:grpSpPr>
+        <a:xfrm>
+          <a:off x="0" y="0"/>
+          <a:ext cx="0" cy="0"/>
+          <a:chOff x="0" y="0"/>
+          <a:chExt cx="0" cy="0"/>
+        </a:xfrm>
+      </p:grpSpPr>
+      <p:sp>
+        <p:nvSpPr>
+          <p:cNvPr id="3" name="TextBox 2">
+            <a:extLst>
+              <a:ext uri="{FF2B5EF4-FFF2-40B4-BE49-F238E27FC236}">
+                <a16:creationId xmlns:a16="http://schemas.microsoft.com/office/drawing/2014/main" id="{B33F1B3A-F62C-99D2-A537-83520677AE8B}"/>
+              </a:ext>
+            </a:extLst>
+          </p:cNvPr>
+          <p:cNvSpPr txBox="1"/>
+          <p:nvPr/>
+        </p:nvSpPr>
+        <p:spPr>
+          <a:xfrm>
+            <a:off x="0" y="0"/>
+            <a:ext cx="12192000" cy="355354"/>
+          </a:xfrm>
+          <a:prstGeom prst="rect">
+            <a:avLst/>
+          </a:prstGeom>
+          <a:noFill/>
+        </p:spPr>
+        <p:txBody>
+          <a:bodyPr wrap="square">
+            <a:spAutoFit/>
+          </a:bodyPr>
+          <a:lstStyle/>
+          <a:p>
+            <a:pPr>
+              <a:lnSpc>
+                <a:spcPct val="150000"/>
+              </a:lnSpc>
+              <a:buNone/>
+            </a:pPr>
+            <a:r>
+              <a:rPr kumimoji="0" lang="en-US" altLang="en-US" sz="1300" b="0" i="0" u="none" strike="noStrike" cap="none" normalizeH="0" baseline="0">
+                <a:ln>
+                  <a:noFill/>
+                </a:ln>
+                <a:solidFill>
+                  <a:schemeClr val="tx1"/>
+                </a:solidFill>
+                <a:effectLst/>
+                <a:latin typeface="Arial" panose="020B0604020202020204" pitchFamily="34" charset="0"/>
+              </a:rPr>
+              <a:t>.</a:t>
+            </a:r>
+          </a:p>
+        </p:txBody>
+      </p:sp>
+      <p:pic>
+        <p:nvPicPr>
+          <p:cNvPr id="4" name="Picture 3">
+            <a:extLst>
+              <a:ext uri="{FF2B5EF4-FFF2-40B4-BE49-F238E27FC236}">
+                <a16:creationId xmlns:a16="http://schemas.microsoft.com/office/drawing/2014/main" id="{6E3C3DF2-888E-A00E-4646-AB3BE8CEA8CE}"/>
+              </a:ext>
+            </a:extLst>
+          </p:cNvPr>
+          <p:cNvPicPr>
+            <a:picLocks noChangeAspect="1"/>
+          </p:cNvPicPr>
+          <p:nvPr/>
+        </p:nvPicPr>
+        <p:blipFill>
+          <a:blip r:embed="rId2"/>
+          <a:stretch>
+            <a:fillRect/>
+          </a:stretch>
+        </p:blipFill>
+        <p:spPr>
+          <a:xfrm>
+            <a:off x="1061190" y="0"/>
+            <a:ext cx="10069620" cy="6858000"/>
+          </a:xfrm>
+          <a:prstGeom prst="rect">
+            <a:avLst/>
+          </a:prstGeom>
+        </p:spPr>
+      </p:pic>
+    </p:spTree>
+    <p:extLst>
+      <p:ext uri="{BB962C8B-B14F-4D97-AF65-F5344CB8AC3E}">
+        <p14:creationId xmlns:p14="http://schemas.microsoft.com/office/powerpoint/2010/main" val="581478419"/>
       </p:ext>
     </p:extLst>
   </p:cSld>
@@ -3472,10 +4744,938 @@
           </a:p>
         </p:txBody>
       </p:sp>
+      <p:pic>
+        <p:nvPicPr>
+          <p:cNvPr id="4" name="Picture 3">
+            <a:extLst>
+              <a:ext uri="{FF2B5EF4-FFF2-40B4-BE49-F238E27FC236}">
+                <a16:creationId xmlns:a16="http://schemas.microsoft.com/office/drawing/2014/main" id="{7FBB328D-0485-4599-6A15-B47262A25C13}"/>
+              </a:ext>
+            </a:extLst>
+          </p:cNvPr>
+          <p:cNvPicPr>
+            <a:picLocks noChangeAspect="1"/>
+          </p:cNvPicPr>
+          <p:nvPr/>
+        </p:nvPicPr>
+        <p:blipFill>
+          <a:blip r:embed="rId2"/>
+          <a:stretch>
+            <a:fillRect/>
+          </a:stretch>
+        </p:blipFill>
+        <p:spPr>
+          <a:xfrm>
+            <a:off x="1660127" y="0"/>
+            <a:ext cx="8871745" cy="6858000"/>
+          </a:xfrm>
+          <a:prstGeom prst="rect">
+            <a:avLst/>
+          </a:prstGeom>
+        </p:spPr>
+      </p:pic>
     </p:spTree>
     <p:extLst>
       <p:ext uri="{BB962C8B-B14F-4D97-AF65-F5344CB8AC3E}">
         <p14:creationId xmlns:p14="http://schemas.microsoft.com/office/powerpoint/2010/main" val="4089772302"/>
+      </p:ext>
+    </p:extLst>
+  </p:cSld>
+  <p:clrMapOvr>
+    <a:masterClrMapping/>
+  </p:clrMapOvr>
+</p:sld>
+</file>
+
+<file path=ppt/slides/slide20.xml><?xml version="1.0" encoding="utf-8"?>
+<p:sld xmlns:a="http://schemas.openxmlformats.org/drawingml/2006/main" xmlns:r="http://schemas.openxmlformats.org/officeDocument/2006/relationships" xmlns:p="http://schemas.openxmlformats.org/presentationml/2006/main">
+  <p:cSld>
+    <p:spTree>
+      <p:nvGrpSpPr>
+        <p:cNvPr id="1" name="">
+          <a:extLst>
+            <a:ext uri="{FF2B5EF4-FFF2-40B4-BE49-F238E27FC236}">
+              <a16:creationId xmlns:a16="http://schemas.microsoft.com/office/drawing/2014/main" id="{DE340098-BB8A-A4E6-6456-1DF4CF2D9671}"/>
+            </a:ext>
+          </a:extLst>
+        </p:cNvPr>
+        <p:cNvGrpSpPr/>
+        <p:nvPr/>
+      </p:nvGrpSpPr>
+      <p:grpSpPr>
+        <a:xfrm>
+          <a:off x="0" y="0"/>
+          <a:ext cx="0" cy="0"/>
+          <a:chOff x="0" y="0"/>
+          <a:chExt cx="0" cy="0"/>
+        </a:xfrm>
+      </p:grpSpPr>
+      <p:sp>
+        <p:nvSpPr>
+          <p:cNvPr id="3" name="TextBox 2">
+            <a:extLst>
+              <a:ext uri="{FF2B5EF4-FFF2-40B4-BE49-F238E27FC236}">
+                <a16:creationId xmlns:a16="http://schemas.microsoft.com/office/drawing/2014/main" id="{0D1FCE9D-CBD5-52FD-ACF3-A3A03530D33A}"/>
+              </a:ext>
+            </a:extLst>
+          </p:cNvPr>
+          <p:cNvSpPr txBox="1"/>
+          <p:nvPr/>
+        </p:nvSpPr>
+        <p:spPr>
+          <a:xfrm>
+            <a:off x="0" y="0"/>
+            <a:ext cx="12192000" cy="355354"/>
+          </a:xfrm>
+          <a:prstGeom prst="rect">
+            <a:avLst/>
+          </a:prstGeom>
+          <a:noFill/>
+        </p:spPr>
+        <p:txBody>
+          <a:bodyPr wrap="square">
+            <a:spAutoFit/>
+          </a:bodyPr>
+          <a:lstStyle/>
+          <a:p>
+            <a:pPr>
+              <a:lnSpc>
+                <a:spcPct val="150000"/>
+              </a:lnSpc>
+              <a:buNone/>
+            </a:pPr>
+            <a:r>
+              <a:rPr kumimoji="0" lang="en-US" altLang="en-US" sz="1300" b="0" i="0" u="none" strike="noStrike" cap="none" normalizeH="0" baseline="0">
+                <a:ln>
+                  <a:noFill/>
+                </a:ln>
+                <a:solidFill>
+                  <a:schemeClr val="tx1"/>
+                </a:solidFill>
+                <a:effectLst/>
+                <a:latin typeface="Arial" panose="020B0604020202020204" pitchFamily="34" charset="0"/>
+              </a:rPr>
+              <a:t>.</a:t>
+            </a:r>
+          </a:p>
+        </p:txBody>
+      </p:sp>
+      <p:pic>
+        <p:nvPicPr>
+          <p:cNvPr id="4" name="Picture 3">
+            <a:extLst>
+              <a:ext uri="{FF2B5EF4-FFF2-40B4-BE49-F238E27FC236}">
+                <a16:creationId xmlns:a16="http://schemas.microsoft.com/office/drawing/2014/main" id="{92EB6D2F-B829-B30F-1247-BE17C14A9278}"/>
+              </a:ext>
+            </a:extLst>
+          </p:cNvPr>
+          <p:cNvPicPr>
+            <a:picLocks noChangeAspect="1"/>
+          </p:cNvPicPr>
+          <p:nvPr/>
+        </p:nvPicPr>
+        <p:blipFill>
+          <a:blip r:embed="rId2"/>
+          <a:stretch>
+            <a:fillRect/>
+          </a:stretch>
+        </p:blipFill>
+        <p:spPr>
+          <a:xfrm>
+            <a:off x="423203" y="0"/>
+            <a:ext cx="11345594" cy="6858000"/>
+          </a:xfrm>
+          <a:prstGeom prst="rect">
+            <a:avLst/>
+          </a:prstGeom>
+        </p:spPr>
+      </p:pic>
+    </p:spTree>
+    <p:extLst>
+      <p:ext uri="{BB962C8B-B14F-4D97-AF65-F5344CB8AC3E}">
+        <p14:creationId xmlns:p14="http://schemas.microsoft.com/office/powerpoint/2010/main" val="2528483822"/>
+      </p:ext>
+    </p:extLst>
+  </p:cSld>
+  <p:clrMapOvr>
+    <a:masterClrMapping/>
+  </p:clrMapOvr>
+</p:sld>
+</file>
+
+<file path=ppt/slides/slide21.xml><?xml version="1.0" encoding="utf-8"?>
+<p:sld xmlns:a="http://schemas.openxmlformats.org/drawingml/2006/main" xmlns:r="http://schemas.openxmlformats.org/officeDocument/2006/relationships" xmlns:p="http://schemas.openxmlformats.org/presentationml/2006/main">
+  <p:cSld>
+    <p:spTree>
+      <p:nvGrpSpPr>
+        <p:cNvPr id="1" name="">
+          <a:extLst>
+            <a:ext uri="{FF2B5EF4-FFF2-40B4-BE49-F238E27FC236}">
+              <a16:creationId xmlns:a16="http://schemas.microsoft.com/office/drawing/2014/main" id="{9BDABA91-A538-673B-2DB1-A2CFA874BFFC}"/>
+            </a:ext>
+          </a:extLst>
+        </p:cNvPr>
+        <p:cNvGrpSpPr/>
+        <p:nvPr/>
+      </p:nvGrpSpPr>
+      <p:grpSpPr>
+        <a:xfrm>
+          <a:off x="0" y="0"/>
+          <a:ext cx="0" cy="0"/>
+          <a:chOff x="0" y="0"/>
+          <a:chExt cx="0" cy="0"/>
+        </a:xfrm>
+      </p:grpSpPr>
+      <p:sp>
+        <p:nvSpPr>
+          <p:cNvPr id="3" name="TextBox 2">
+            <a:extLst>
+              <a:ext uri="{FF2B5EF4-FFF2-40B4-BE49-F238E27FC236}">
+                <a16:creationId xmlns:a16="http://schemas.microsoft.com/office/drawing/2014/main" id="{1E0C1900-D07F-A65F-180A-90C964B635C9}"/>
+              </a:ext>
+            </a:extLst>
+          </p:cNvPr>
+          <p:cNvSpPr txBox="1"/>
+          <p:nvPr/>
+        </p:nvSpPr>
+        <p:spPr>
+          <a:xfrm>
+            <a:off x="0" y="0"/>
+            <a:ext cx="12192000" cy="355354"/>
+          </a:xfrm>
+          <a:prstGeom prst="rect">
+            <a:avLst/>
+          </a:prstGeom>
+          <a:noFill/>
+        </p:spPr>
+        <p:txBody>
+          <a:bodyPr wrap="square">
+            <a:spAutoFit/>
+          </a:bodyPr>
+          <a:lstStyle/>
+          <a:p>
+            <a:pPr>
+              <a:lnSpc>
+                <a:spcPct val="150000"/>
+              </a:lnSpc>
+              <a:buNone/>
+            </a:pPr>
+            <a:r>
+              <a:rPr kumimoji="0" lang="en-US" altLang="en-US" sz="1300" b="0" i="0" u="none" strike="noStrike" cap="none" normalizeH="0" baseline="0">
+                <a:ln>
+                  <a:noFill/>
+                </a:ln>
+                <a:solidFill>
+                  <a:schemeClr val="tx1"/>
+                </a:solidFill>
+                <a:effectLst/>
+                <a:latin typeface="Arial" panose="020B0604020202020204" pitchFamily="34" charset="0"/>
+              </a:rPr>
+              <a:t>.</a:t>
+            </a:r>
+          </a:p>
+        </p:txBody>
+      </p:sp>
+      <p:pic>
+        <p:nvPicPr>
+          <p:cNvPr id="4" name="Picture 3">
+            <a:extLst>
+              <a:ext uri="{FF2B5EF4-FFF2-40B4-BE49-F238E27FC236}">
+                <a16:creationId xmlns:a16="http://schemas.microsoft.com/office/drawing/2014/main" id="{2F0E2192-6191-DBC4-0131-A6C4408846AD}"/>
+              </a:ext>
+            </a:extLst>
+          </p:cNvPr>
+          <p:cNvPicPr>
+            <a:picLocks noChangeAspect="1"/>
+          </p:cNvPicPr>
+          <p:nvPr/>
+        </p:nvPicPr>
+        <p:blipFill>
+          <a:blip r:embed="rId2"/>
+          <a:stretch>
+            <a:fillRect/>
+          </a:stretch>
+        </p:blipFill>
+        <p:spPr>
+          <a:xfrm>
+            <a:off x="2888339" y="0"/>
+            <a:ext cx="6415322" cy="6858000"/>
+          </a:xfrm>
+          <a:prstGeom prst="rect">
+            <a:avLst/>
+          </a:prstGeom>
+        </p:spPr>
+      </p:pic>
+    </p:spTree>
+    <p:extLst>
+      <p:ext uri="{BB962C8B-B14F-4D97-AF65-F5344CB8AC3E}">
+        <p14:creationId xmlns:p14="http://schemas.microsoft.com/office/powerpoint/2010/main" val="2677469341"/>
+      </p:ext>
+    </p:extLst>
+  </p:cSld>
+  <p:clrMapOvr>
+    <a:masterClrMapping/>
+  </p:clrMapOvr>
+</p:sld>
+</file>
+
+<file path=ppt/slides/slide22.xml><?xml version="1.0" encoding="utf-8"?>
+<p:sld xmlns:a="http://schemas.openxmlformats.org/drawingml/2006/main" xmlns:r="http://schemas.openxmlformats.org/officeDocument/2006/relationships" xmlns:p="http://schemas.openxmlformats.org/presentationml/2006/main">
+  <p:cSld>
+    <p:spTree>
+      <p:nvGrpSpPr>
+        <p:cNvPr id="1" name="">
+          <a:extLst>
+            <a:ext uri="{FF2B5EF4-FFF2-40B4-BE49-F238E27FC236}">
+              <a16:creationId xmlns:a16="http://schemas.microsoft.com/office/drawing/2014/main" id="{B2CA69EB-4848-6732-B4E5-9BFD5145A01A}"/>
+            </a:ext>
+          </a:extLst>
+        </p:cNvPr>
+        <p:cNvGrpSpPr/>
+        <p:nvPr/>
+      </p:nvGrpSpPr>
+      <p:grpSpPr>
+        <a:xfrm>
+          <a:off x="0" y="0"/>
+          <a:ext cx="0" cy="0"/>
+          <a:chOff x="0" y="0"/>
+          <a:chExt cx="0" cy="0"/>
+        </a:xfrm>
+      </p:grpSpPr>
+      <p:sp>
+        <p:nvSpPr>
+          <p:cNvPr id="3" name="TextBox 2">
+            <a:extLst>
+              <a:ext uri="{FF2B5EF4-FFF2-40B4-BE49-F238E27FC236}">
+                <a16:creationId xmlns:a16="http://schemas.microsoft.com/office/drawing/2014/main" id="{B62FDC49-6456-6536-3C9E-D3C0CF18ADB0}"/>
+              </a:ext>
+            </a:extLst>
+          </p:cNvPr>
+          <p:cNvSpPr txBox="1"/>
+          <p:nvPr/>
+        </p:nvSpPr>
+        <p:spPr>
+          <a:xfrm>
+            <a:off x="0" y="0"/>
+            <a:ext cx="12192000" cy="355354"/>
+          </a:xfrm>
+          <a:prstGeom prst="rect">
+            <a:avLst/>
+          </a:prstGeom>
+          <a:noFill/>
+        </p:spPr>
+        <p:txBody>
+          <a:bodyPr wrap="square">
+            <a:spAutoFit/>
+          </a:bodyPr>
+          <a:lstStyle/>
+          <a:p>
+            <a:pPr>
+              <a:lnSpc>
+                <a:spcPct val="150000"/>
+              </a:lnSpc>
+              <a:buNone/>
+            </a:pPr>
+            <a:r>
+              <a:rPr kumimoji="0" lang="en-US" altLang="en-US" sz="1300" b="0" i="0" u="none" strike="noStrike" cap="none" normalizeH="0" baseline="0">
+                <a:ln>
+                  <a:noFill/>
+                </a:ln>
+                <a:solidFill>
+                  <a:schemeClr val="tx1"/>
+                </a:solidFill>
+                <a:effectLst/>
+                <a:latin typeface="Arial" panose="020B0604020202020204" pitchFamily="34" charset="0"/>
+              </a:rPr>
+              <a:t>.</a:t>
+            </a:r>
+          </a:p>
+        </p:txBody>
+      </p:sp>
+      <p:pic>
+        <p:nvPicPr>
+          <p:cNvPr id="4" name="Picture 3">
+            <a:extLst>
+              <a:ext uri="{FF2B5EF4-FFF2-40B4-BE49-F238E27FC236}">
+                <a16:creationId xmlns:a16="http://schemas.microsoft.com/office/drawing/2014/main" id="{3FC6B780-6CFB-FA22-CDC8-056225F908C1}"/>
+              </a:ext>
+            </a:extLst>
+          </p:cNvPr>
+          <p:cNvPicPr>
+            <a:picLocks noChangeAspect="1"/>
+          </p:cNvPicPr>
+          <p:nvPr/>
+        </p:nvPicPr>
+        <p:blipFill>
+          <a:blip r:embed="rId2"/>
+          <a:stretch>
+            <a:fillRect/>
+          </a:stretch>
+        </p:blipFill>
+        <p:spPr>
+          <a:xfrm>
+            <a:off x="0" y="1639056"/>
+            <a:ext cx="12192000" cy="3579887"/>
+          </a:xfrm>
+          <a:prstGeom prst="rect">
+            <a:avLst/>
+          </a:prstGeom>
+          <a:solidFill>
+            <a:srgbClr val="FFFFFF">
+              <a:shade val="85000"/>
+            </a:srgbClr>
+          </a:solidFill>
+          <a:ln w="88900" cap="sq">
+            <a:solidFill>
+              <a:srgbClr val="FFFFFF"/>
+            </a:solidFill>
+            <a:miter lim="800000"/>
+          </a:ln>
+          <a:effectLst>
+            <a:outerShdw blurRad="55000" dist="18000" dir="5400000" algn="tl" rotWithShape="0">
+              <a:srgbClr val="000000">
+                <a:alpha val="40000"/>
+              </a:srgbClr>
+            </a:outerShdw>
+          </a:effectLst>
+          <a:scene3d>
+            <a:camera prst="orthographicFront"/>
+            <a:lightRig rig="twoPt" dir="t">
+              <a:rot lat="0" lon="0" rev="7200000"/>
+            </a:lightRig>
+          </a:scene3d>
+          <a:sp3d>
+            <a:bevelT w="25400" h="19050"/>
+            <a:contourClr>
+              <a:srgbClr val="FFFFFF"/>
+            </a:contourClr>
+          </a:sp3d>
+        </p:spPr>
+      </p:pic>
+    </p:spTree>
+    <p:extLst>
+      <p:ext uri="{BB962C8B-B14F-4D97-AF65-F5344CB8AC3E}">
+        <p14:creationId xmlns:p14="http://schemas.microsoft.com/office/powerpoint/2010/main" val="3716695121"/>
+      </p:ext>
+    </p:extLst>
+  </p:cSld>
+  <p:clrMapOvr>
+    <a:masterClrMapping/>
+  </p:clrMapOvr>
+</p:sld>
+</file>
+
+<file path=ppt/slides/slide23.xml><?xml version="1.0" encoding="utf-8"?>
+<p:sld xmlns:a="http://schemas.openxmlformats.org/drawingml/2006/main" xmlns:r="http://schemas.openxmlformats.org/officeDocument/2006/relationships" xmlns:p="http://schemas.openxmlformats.org/presentationml/2006/main">
+  <p:cSld>
+    <p:spTree>
+      <p:nvGrpSpPr>
+        <p:cNvPr id="1" name="">
+          <a:extLst>
+            <a:ext uri="{FF2B5EF4-FFF2-40B4-BE49-F238E27FC236}">
+              <a16:creationId xmlns:a16="http://schemas.microsoft.com/office/drawing/2014/main" id="{5065B563-1316-F06B-C316-61BAEEFB10F3}"/>
+            </a:ext>
+          </a:extLst>
+        </p:cNvPr>
+        <p:cNvGrpSpPr/>
+        <p:nvPr/>
+      </p:nvGrpSpPr>
+      <p:grpSpPr>
+        <a:xfrm>
+          <a:off x="0" y="0"/>
+          <a:ext cx="0" cy="0"/>
+          <a:chOff x="0" y="0"/>
+          <a:chExt cx="0" cy="0"/>
+        </a:xfrm>
+      </p:grpSpPr>
+      <p:sp>
+        <p:nvSpPr>
+          <p:cNvPr id="3" name="TextBox 2">
+            <a:extLst>
+              <a:ext uri="{FF2B5EF4-FFF2-40B4-BE49-F238E27FC236}">
+                <a16:creationId xmlns:a16="http://schemas.microsoft.com/office/drawing/2014/main" id="{918AC679-6FE3-0BEF-CAE3-C5812638A37C}"/>
+              </a:ext>
+            </a:extLst>
+          </p:cNvPr>
+          <p:cNvSpPr txBox="1"/>
+          <p:nvPr/>
+        </p:nvSpPr>
+        <p:spPr>
+          <a:xfrm>
+            <a:off x="0" y="0"/>
+            <a:ext cx="12192000" cy="355354"/>
+          </a:xfrm>
+          <a:prstGeom prst="rect">
+            <a:avLst/>
+          </a:prstGeom>
+          <a:noFill/>
+        </p:spPr>
+        <p:txBody>
+          <a:bodyPr wrap="square">
+            <a:spAutoFit/>
+          </a:bodyPr>
+          <a:lstStyle/>
+          <a:p>
+            <a:pPr>
+              <a:lnSpc>
+                <a:spcPct val="150000"/>
+              </a:lnSpc>
+              <a:buNone/>
+            </a:pPr>
+            <a:r>
+              <a:rPr kumimoji="0" lang="en-US" altLang="en-US" sz="1300" b="0" i="0" u="none" strike="noStrike" cap="none" normalizeH="0" baseline="0">
+                <a:ln>
+                  <a:noFill/>
+                </a:ln>
+                <a:solidFill>
+                  <a:schemeClr val="tx1"/>
+                </a:solidFill>
+                <a:effectLst/>
+                <a:latin typeface="Arial" panose="020B0604020202020204" pitchFamily="34" charset="0"/>
+              </a:rPr>
+              <a:t>.</a:t>
+            </a:r>
+          </a:p>
+        </p:txBody>
+      </p:sp>
+      <p:pic>
+        <p:nvPicPr>
+          <p:cNvPr id="4" name="Picture 3">
+            <a:extLst>
+              <a:ext uri="{FF2B5EF4-FFF2-40B4-BE49-F238E27FC236}">
+                <a16:creationId xmlns:a16="http://schemas.microsoft.com/office/drawing/2014/main" id="{29868568-F569-555E-21E4-B88761B7EBEB}"/>
+              </a:ext>
+            </a:extLst>
+          </p:cNvPr>
+          <p:cNvPicPr>
+            <a:picLocks noChangeAspect="1"/>
+          </p:cNvPicPr>
+          <p:nvPr/>
+        </p:nvPicPr>
+        <p:blipFill>
+          <a:blip r:embed="rId2"/>
+          <a:stretch>
+            <a:fillRect/>
+          </a:stretch>
+        </p:blipFill>
+        <p:spPr>
+          <a:xfrm>
+            <a:off x="0" y="307822"/>
+            <a:ext cx="12192000" cy="6242355"/>
+          </a:xfrm>
+          <a:prstGeom prst="rect">
+            <a:avLst/>
+          </a:prstGeom>
+        </p:spPr>
+      </p:pic>
+    </p:spTree>
+    <p:extLst>
+      <p:ext uri="{BB962C8B-B14F-4D97-AF65-F5344CB8AC3E}">
+        <p14:creationId xmlns:p14="http://schemas.microsoft.com/office/powerpoint/2010/main" val="1545134873"/>
+      </p:ext>
+    </p:extLst>
+  </p:cSld>
+  <p:clrMapOvr>
+    <a:masterClrMapping/>
+  </p:clrMapOvr>
+</p:sld>
+</file>
+
+<file path=ppt/slides/slide24.xml><?xml version="1.0" encoding="utf-8"?>
+<p:sld xmlns:a="http://schemas.openxmlformats.org/drawingml/2006/main" xmlns:r="http://schemas.openxmlformats.org/officeDocument/2006/relationships" xmlns:p="http://schemas.openxmlformats.org/presentationml/2006/main">
+  <p:cSld>
+    <p:spTree>
+      <p:nvGrpSpPr>
+        <p:cNvPr id="1" name="">
+          <a:extLst>
+            <a:ext uri="{FF2B5EF4-FFF2-40B4-BE49-F238E27FC236}">
+              <a16:creationId xmlns:a16="http://schemas.microsoft.com/office/drawing/2014/main" id="{8E7446E6-71A6-C5EE-BA3A-9785C3019421}"/>
+            </a:ext>
+          </a:extLst>
+        </p:cNvPr>
+        <p:cNvGrpSpPr/>
+        <p:nvPr/>
+      </p:nvGrpSpPr>
+      <p:grpSpPr>
+        <a:xfrm>
+          <a:off x="0" y="0"/>
+          <a:ext cx="0" cy="0"/>
+          <a:chOff x="0" y="0"/>
+          <a:chExt cx="0" cy="0"/>
+        </a:xfrm>
+      </p:grpSpPr>
+      <p:sp>
+        <p:nvSpPr>
+          <p:cNvPr id="3" name="TextBox 2">
+            <a:extLst>
+              <a:ext uri="{FF2B5EF4-FFF2-40B4-BE49-F238E27FC236}">
+                <a16:creationId xmlns:a16="http://schemas.microsoft.com/office/drawing/2014/main" id="{7997453F-CEC0-A1AF-1B21-1A516A457E3E}"/>
+              </a:ext>
+            </a:extLst>
+          </p:cNvPr>
+          <p:cNvSpPr txBox="1"/>
+          <p:nvPr/>
+        </p:nvSpPr>
+        <p:spPr>
+          <a:xfrm>
+            <a:off x="0" y="0"/>
+            <a:ext cx="12192000" cy="355354"/>
+          </a:xfrm>
+          <a:prstGeom prst="rect">
+            <a:avLst/>
+          </a:prstGeom>
+          <a:noFill/>
+        </p:spPr>
+        <p:txBody>
+          <a:bodyPr wrap="square">
+            <a:spAutoFit/>
+          </a:bodyPr>
+          <a:lstStyle/>
+          <a:p>
+            <a:pPr>
+              <a:lnSpc>
+                <a:spcPct val="150000"/>
+              </a:lnSpc>
+              <a:buNone/>
+            </a:pPr>
+            <a:r>
+              <a:rPr kumimoji="0" lang="en-US" altLang="en-US" sz="1300" b="0" i="0" u="none" strike="noStrike" cap="none" normalizeH="0" baseline="0">
+                <a:ln>
+                  <a:noFill/>
+                </a:ln>
+                <a:solidFill>
+                  <a:schemeClr val="tx1"/>
+                </a:solidFill>
+                <a:effectLst/>
+                <a:latin typeface="Arial" panose="020B0604020202020204" pitchFamily="34" charset="0"/>
+              </a:rPr>
+              <a:t>.</a:t>
+            </a:r>
+          </a:p>
+        </p:txBody>
+      </p:sp>
+      <p:pic>
+        <p:nvPicPr>
+          <p:cNvPr id="4" name="Picture 3">
+            <a:extLst>
+              <a:ext uri="{FF2B5EF4-FFF2-40B4-BE49-F238E27FC236}">
+                <a16:creationId xmlns:a16="http://schemas.microsoft.com/office/drawing/2014/main" id="{2E68E57A-E541-D69B-CC13-EB8BE25543C3}"/>
+              </a:ext>
+            </a:extLst>
+          </p:cNvPr>
+          <p:cNvPicPr>
+            <a:picLocks noChangeAspect="1"/>
+          </p:cNvPicPr>
+          <p:nvPr/>
+        </p:nvPicPr>
+        <p:blipFill>
+          <a:blip r:embed="rId2"/>
+          <a:stretch>
+            <a:fillRect/>
+          </a:stretch>
+        </p:blipFill>
+        <p:spPr>
+          <a:xfrm>
+            <a:off x="0" y="1598608"/>
+            <a:ext cx="12192000" cy="3660783"/>
+          </a:xfrm>
+          <a:prstGeom prst="rect">
+            <a:avLst/>
+          </a:prstGeom>
+        </p:spPr>
+      </p:pic>
+    </p:spTree>
+    <p:extLst>
+      <p:ext uri="{BB962C8B-B14F-4D97-AF65-F5344CB8AC3E}">
+        <p14:creationId xmlns:p14="http://schemas.microsoft.com/office/powerpoint/2010/main" val="1956431176"/>
+      </p:ext>
+    </p:extLst>
+  </p:cSld>
+  <p:clrMapOvr>
+    <a:masterClrMapping/>
+  </p:clrMapOvr>
+</p:sld>
+</file>
+
+<file path=ppt/slides/slide25.xml><?xml version="1.0" encoding="utf-8"?>
+<p:sld xmlns:a="http://schemas.openxmlformats.org/drawingml/2006/main" xmlns:r="http://schemas.openxmlformats.org/officeDocument/2006/relationships" xmlns:p="http://schemas.openxmlformats.org/presentationml/2006/main">
+  <p:cSld>
+    <p:spTree>
+      <p:nvGrpSpPr>
+        <p:cNvPr id="1" name="">
+          <a:extLst>
+            <a:ext uri="{FF2B5EF4-FFF2-40B4-BE49-F238E27FC236}">
+              <a16:creationId xmlns:a16="http://schemas.microsoft.com/office/drawing/2014/main" id="{56D82180-7051-11CD-09A2-362F42FCFFBF}"/>
+            </a:ext>
+          </a:extLst>
+        </p:cNvPr>
+        <p:cNvGrpSpPr/>
+        <p:nvPr/>
+      </p:nvGrpSpPr>
+      <p:grpSpPr>
+        <a:xfrm>
+          <a:off x="0" y="0"/>
+          <a:ext cx="0" cy="0"/>
+          <a:chOff x="0" y="0"/>
+          <a:chExt cx="0" cy="0"/>
+        </a:xfrm>
+      </p:grpSpPr>
+      <p:sp>
+        <p:nvSpPr>
+          <p:cNvPr id="3" name="TextBox 2">
+            <a:extLst>
+              <a:ext uri="{FF2B5EF4-FFF2-40B4-BE49-F238E27FC236}">
+                <a16:creationId xmlns:a16="http://schemas.microsoft.com/office/drawing/2014/main" id="{16A8C486-F097-AB7D-FADB-3D39B1EBB8D0}"/>
+              </a:ext>
+            </a:extLst>
+          </p:cNvPr>
+          <p:cNvSpPr txBox="1"/>
+          <p:nvPr/>
+        </p:nvSpPr>
+        <p:spPr>
+          <a:xfrm>
+            <a:off x="0" y="0"/>
+            <a:ext cx="12192000" cy="355354"/>
+          </a:xfrm>
+          <a:prstGeom prst="rect">
+            <a:avLst/>
+          </a:prstGeom>
+          <a:noFill/>
+        </p:spPr>
+        <p:txBody>
+          <a:bodyPr wrap="square">
+            <a:spAutoFit/>
+          </a:bodyPr>
+          <a:lstStyle/>
+          <a:p>
+            <a:pPr>
+              <a:lnSpc>
+                <a:spcPct val="150000"/>
+              </a:lnSpc>
+              <a:buNone/>
+            </a:pPr>
+            <a:r>
+              <a:rPr kumimoji="0" lang="en-US" altLang="en-US" sz="1300" b="0" i="0" u="none" strike="noStrike" cap="none" normalizeH="0" baseline="0">
+                <a:ln>
+                  <a:noFill/>
+                </a:ln>
+                <a:solidFill>
+                  <a:schemeClr val="tx1"/>
+                </a:solidFill>
+                <a:effectLst/>
+                <a:latin typeface="Arial" panose="020B0604020202020204" pitchFamily="34" charset="0"/>
+              </a:rPr>
+              <a:t>.</a:t>
+            </a:r>
+          </a:p>
+        </p:txBody>
+      </p:sp>
+      <p:pic>
+        <p:nvPicPr>
+          <p:cNvPr id="4" name="Picture 3">
+            <a:extLst>
+              <a:ext uri="{FF2B5EF4-FFF2-40B4-BE49-F238E27FC236}">
+                <a16:creationId xmlns:a16="http://schemas.microsoft.com/office/drawing/2014/main" id="{FC612FB8-14D7-5029-B051-BF834BDE2A90}"/>
+              </a:ext>
+            </a:extLst>
+          </p:cNvPr>
+          <p:cNvPicPr>
+            <a:picLocks noChangeAspect="1"/>
+          </p:cNvPicPr>
+          <p:nvPr/>
+        </p:nvPicPr>
+        <p:blipFill>
+          <a:blip r:embed="rId2"/>
+          <a:stretch>
+            <a:fillRect/>
+          </a:stretch>
+        </p:blipFill>
+        <p:spPr>
+          <a:xfrm>
+            <a:off x="2194155" y="0"/>
+            <a:ext cx="7803689" cy="6858000"/>
+          </a:xfrm>
+          <a:prstGeom prst="rect">
+            <a:avLst/>
+          </a:prstGeom>
+        </p:spPr>
+      </p:pic>
+    </p:spTree>
+    <p:extLst>
+      <p:ext uri="{BB962C8B-B14F-4D97-AF65-F5344CB8AC3E}">
+        <p14:creationId xmlns:p14="http://schemas.microsoft.com/office/powerpoint/2010/main" val="2732391607"/>
+      </p:ext>
+    </p:extLst>
+  </p:cSld>
+  <p:clrMapOvr>
+    <a:masterClrMapping/>
+  </p:clrMapOvr>
+</p:sld>
+</file>
+
+<file path=ppt/slides/slide26.xml><?xml version="1.0" encoding="utf-8"?>
+<p:sld xmlns:a="http://schemas.openxmlformats.org/drawingml/2006/main" xmlns:r="http://schemas.openxmlformats.org/officeDocument/2006/relationships" xmlns:p="http://schemas.openxmlformats.org/presentationml/2006/main">
+  <p:cSld>
+    <p:spTree>
+      <p:nvGrpSpPr>
+        <p:cNvPr id="1" name="">
+          <a:extLst>
+            <a:ext uri="{FF2B5EF4-FFF2-40B4-BE49-F238E27FC236}">
+              <a16:creationId xmlns:a16="http://schemas.microsoft.com/office/drawing/2014/main" id="{01D69AAD-06A4-ED23-469F-07061DD9E2CD}"/>
+            </a:ext>
+          </a:extLst>
+        </p:cNvPr>
+        <p:cNvGrpSpPr/>
+        <p:nvPr/>
+      </p:nvGrpSpPr>
+      <p:grpSpPr>
+        <a:xfrm>
+          <a:off x="0" y="0"/>
+          <a:ext cx="0" cy="0"/>
+          <a:chOff x="0" y="0"/>
+          <a:chExt cx="0" cy="0"/>
+        </a:xfrm>
+      </p:grpSpPr>
+      <p:sp>
+        <p:nvSpPr>
+          <p:cNvPr id="3" name="TextBox 2">
+            <a:extLst>
+              <a:ext uri="{FF2B5EF4-FFF2-40B4-BE49-F238E27FC236}">
+                <a16:creationId xmlns:a16="http://schemas.microsoft.com/office/drawing/2014/main" id="{D2968C4A-DC30-C706-CBD8-FAFFC864029E}"/>
+              </a:ext>
+            </a:extLst>
+          </p:cNvPr>
+          <p:cNvSpPr txBox="1"/>
+          <p:nvPr/>
+        </p:nvSpPr>
+        <p:spPr>
+          <a:xfrm>
+            <a:off x="0" y="0"/>
+            <a:ext cx="12192000" cy="355354"/>
+          </a:xfrm>
+          <a:prstGeom prst="rect">
+            <a:avLst/>
+          </a:prstGeom>
+          <a:noFill/>
+        </p:spPr>
+        <p:txBody>
+          <a:bodyPr wrap="square">
+            <a:spAutoFit/>
+          </a:bodyPr>
+          <a:lstStyle/>
+          <a:p>
+            <a:pPr>
+              <a:lnSpc>
+                <a:spcPct val="150000"/>
+              </a:lnSpc>
+              <a:buNone/>
+            </a:pPr>
+            <a:r>
+              <a:rPr kumimoji="0" lang="en-US" altLang="en-US" sz="1300" b="0" i="0" u="none" strike="noStrike" cap="none" normalizeH="0" baseline="0">
+                <a:ln>
+                  <a:noFill/>
+                </a:ln>
+                <a:solidFill>
+                  <a:schemeClr val="tx1"/>
+                </a:solidFill>
+                <a:effectLst/>
+                <a:latin typeface="Arial" panose="020B0604020202020204" pitchFamily="34" charset="0"/>
+              </a:rPr>
+              <a:t>.</a:t>
+            </a:r>
+          </a:p>
+        </p:txBody>
+      </p:sp>
+    </p:spTree>
+    <p:extLst>
+      <p:ext uri="{BB962C8B-B14F-4D97-AF65-F5344CB8AC3E}">
+        <p14:creationId xmlns:p14="http://schemas.microsoft.com/office/powerpoint/2010/main" val="3054691027"/>
+      </p:ext>
+    </p:extLst>
+  </p:cSld>
+  <p:clrMapOvr>
+    <a:masterClrMapping/>
+  </p:clrMapOvr>
+</p:sld>
+</file>
+
+<file path=ppt/slides/slide27.xml><?xml version="1.0" encoding="utf-8"?>
+<p:sld xmlns:a="http://schemas.openxmlformats.org/drawingml/2006/main" xmlns:r="http://schemas.openxmlformats.org/officeDocument/2006/relationships" xmlns:p="http://schemas.openxmlformats.org/presentationml/2006/main">
+  <p:cSld>
+    <p:spTree>
+      <p:nvGrpSpPr>
+        <p:cNvPr id="1" name="">
+          <a:extLst>
+            <a:ext uri="{FF2B5EF4-FFF2-40B4-BE49-F238E27FC236}">
+              <a16:creationId xmlns:a16="http://schemas.microsoft.com/office/drawing/2014/main" id="{1B29A76C-72B1-2642-50B4-EC62E4C7E734}"/>
+            </a:ext>
+          </a:extLst>
+        </p:cNvPr>
+        <p:cNvGrpSpPr/>
+        <p:nvPr/>
+      </p:nvGrpSpPr>
+      <p:grpSpPr>
+        <a:xfrm>
+          <a:off x="0" y="0"/>
+          <a:ext cx="0" cy="0"/>
+          <a:chOff x="0" y="0"/>
+          <a:chExt cx="0" cy="0"/>
+        </a:xfrm>
+      </p:grpSpPr>
+      <p:sp>
+        <p:nvSpPr>
+          <p:cNvPr id="3" name="TextBox 2">
+            <a:extLst>
+              <a:ext uri="{FF2B5EF4-FFF2-40B4-BE49-F238E27FC236}">
+                <a16:creationId xmlns:a16="http://schemas.microsoft.com/office/drawing/2014/main" id="{C1E8604B-1031-BB21-3744-5470EEF9FF31}"/>
+              </a:ext>
+            </a:extLst>
+          </p:cNvPr>
+          <p:cNvSpPr txBox="1"/>
+          <p:nvPr/>
+        </p:nvSpPr>
+        <p:spPr>
+          <a:xfrm>
+            <a:off x="0" y="0"/>
+            <a:ext cx="12192000" cy="355354"/>
+          </a:xfrm>
+          <a:prstGeom prst="rect">
+            <a:avLst/>
+          </a:prstGeom>
+          <a:noFill/>
+        </p:spPr>
+        <p:txBody>
+          <a:bodyPr wrap="square">
+            <a:spAutoFit/>
+          </a:bodyPr>
+          <a:lstStyle/>
+          <a:p>
+            <a:pPr>
+              <a:lnSpc>
+                <a:spcPct val="150000"/>
+              </a:lnSpc>
+              <a:buNone/>
+            </a:pPr>
+            <a:r>
+              <a:rPr kumimoji="0" lang="en-US" altLang="en-US" sz="1300" b="0" i="0" u="none" strike="noStrike" cap="none" normalizeH="0" baseline="0">
+                <a:ln>
+                  <a:noFill/>
+                </a:ln>
+                <a:solidFill>
+                  <a:schemeClr val="tx1"/>
+                </a:solidFill>
+                <a:effectLst/>
+                <a:latin typeface="Arial" panose="020B0604020202020204" pitchFamily="34" charset="0"/>
+              </a:rPr>
+              <a:t>.</a:t>
+            </a:r>
+          </a:p>
+        </p:txBody>
+      </p:sp>
+    </p:spTree>
+    <p:extLst>
+      <p:ext uri="{BB962C8B-B14F-4D97-AF65-F5344CB8AC3E}">
+        <p14:creationId xmlns:p14="http://schemas.microsoft.com/office/powerpoint/2010/main" val="1857596514"/>
       </p:ext>
     </p:extLst>
   </p:cSld>
@@ -3558,6 +5758,36 @@
           </a:p>
         </p:txBody>
       </p:sp>
+      <p:pic>
+        <p:nvPicPr>
+          <p:cNvPr id="4" name="Picture 3">
+            <a:extLst>
+              <a:ext uri="{FF2B5EF4-FFF2-40B4-BE49-F238E27FC236}">
+                <a16:creationId xmlns:a16="http://schemas.microsoft.com/office/drawing/2014/main" id="{2E09D4E7-DCC9-9EF1-F632-78846B48E41F}"/>
+              </a:ext>
+            </a:extLst>
+          </p:cNvPr>
+          <p:cNvPicPr>
+            <a:picLocks noChangeAspect="1"/>
+          </p:cNvPicPr>
+          <p:nvPr/>
+        </p:nvPicPr>
+        <p:blipFill>
+          <a:blip r:embed="rId2"/>
+          <a:stretch>
+            <a:fillRect/>
+          </a:stretch>
+        </p:blipFill>
+        <p:spPr>
+          <a:xfrm>
+            <a:off x="1722527" y="0"/>
+            <a:ext cx="8746945" cy="6858000"/>
+          </a:xfrm>
+          <a:prstGeom prst="rect">
+            <a:avLst/>
+          </a:prstGeom>
+        </p:spPr>
+      </p:pic>
     </p:spTree>
     <p:extLst>
       <p:ext uri="{BB962C8B-B14F-4D97-AF65-F5344CB8AC3E}">
@@ -3644,6 +5874,36 @@
           </a:p>
         </p:txBody>
       </p:sp>
+      <p:pic>
+        <p:nvPicPr>
+          <p:cNvPr id="4" name="Picture 3">
+            <a:extLst>
+              <a:ext uri="{FF2B5EF4-FFF2-40B4-BE49-F238E27FC236}">
+                <a16:creationId xmlns:a16="http://schemas.microsoft.com/office/drawing/2014/main" id="{E6234E00-B8BB-45FD-F253-F93A26B09889}"/>
+              </a:ext>
+            </a:extLst>
+          </p:cNvPr>
+          <p:cNvPicPr>
+            <a:picLocks noChangeAspect="1"/>
+          </p:cNvPicPr>
+          <p:nvPr/>
+        </p:nvPicPr>
+        <p:blipFill>
+          <a:blip r:embed="rId2"/>
+          <a:stretch>
+            <a:fillRect/>
+          </a:stretch>
+        </p:blipFill>
+        <p:spPr>
+          <a:xfrm>
+            <a:off x="2911181" y="0"/>
+            <a:ext cx="6369638" cy="6858000"/>
+          </a:xfrm>
+          <a:prstGeom prst="rect">
+            <a:avLst/>
+          </a:prstGeom>
+        </p:spPr>
+      </p:pic>
     </p:spTree>
     <p:extLst>
       <p:ext uri="{BB962C8B-B14F-4D97-AF65-F5344CB8AC3E}">
@@ -3665,7 +5925,7 @@
         <p:cNvPr id="1" name="">
           <a:extLst>
             <a:ext uri="{FF2B5EF4-FFF2-40B4-BE49-F238E27FC236}">
-              <a16:creationId xmlns:a16="http://schemas.microsoft.com/office/drawing/2014/main" id="{234FC578-E916-157D-9E34-98C92603E544}"/>
+              <a16:creationId xmlns:a16="http://schemas.microsoft.com/office/drawing/2014/main" id="{069D0B87-24FA-F363-3A12-3163E2B2BB86}"/>
             </a:ext>
           </a:extLst>
         </p:cNvPr>
@@ -3685,7 +5945,7 @@
           <p:cNvPr id="3" name="TextBox 2">
             <a:extLst>
               <a:ext uri="{FF2B5EF4-FFF2-40B4-BE49-F238E27FC236}">
-                <a16:creationId xmlns:a16="http://schemas.microsoft.com/office/drawing/2014/main" id="{44E910EB-F8CF-72DB-1654-E9E111A3D87E}"/>
+                <a16:creationId xmlns:a16="http://schemas.microsoft.com/office/drawing/2014/main" id="{2FA950A3-95C3-BA9E-0434-D07743069FFB}"/>
               </a:ext>
             </a:extLst>
           </p:cNvPr>
@@ -3730,10 +5990,624 @@
           </a:p>
         </p:txBody>
       </p:sp>
+      <p:pic>
+        <p:nvPicPr>
+          <p:cNvPr id="4" name="Picture 3">
+            <a:extLst>
+              <a:ext uri="{FF2B5EF4-FFF2-40B4-BE49-F238E27FC236}">
+                <a16:creationId xmlns:a16="http://schemas.microsoft.com/office/drawing/2014/main" id="{09F4F7CA-F7CE-D280-5E16-F144FA61092A}"/>
+              </a:ext>
+            </a:extLst>
+          </p:cNvPr>
+          <p:cNvPicPr>
+            <a:picLocks noChangeAspect="1"/>
+          </p:cNvPicPr>
+          <p:nvPr/>
+        </p:nvPicPr>
+        <p:blipFill>
+          <a:blip r:embed="rId2"/>
+          <a:stretch>
+            <a:fillRect/>
+          </a:stretch>
+        </p:blipFill>
+        <p:spPr>
+          <a:xfrm>
+            <a:off x="0" y="1538569"/>
+            <a:ext cx="12192000" cy="3780861"/>
+          </a:xfrm>
+          <a:prstGeom prst="rect">
+            <a:avLst/>
+          </a:prstGeom>
+          <a:solidFill>
+            <a:srgbClr val="FFFFFF">
+              <a:shade val="85000"/>
+            </a:srgbClr>
+          </a:solidFill>
+          <a:ln w="88900" cap="sq">
+            <a:solidFill>
+              <a:srgbClr val="FFFFFF"/>
+            </a:solidFill>
+            <a:miter lim="800000"/>
+          </a:ln>
+          <a:effectLst>
+            <a:outerShdw blurRad="55000" dist="18000" dir="5400000" algn="tl" rotWithShape="0">
+              <a:srgbClr val="000000">
+                <a:alpha val="40000"/>
+              </a:srgbClr>
+            </a:outerShdw>
+          </a:effectLst>
+          <a:scene3d>
+            <a:camera prst="orthographicFront"/>
+            <a:lightRig rig="twoPt" dir="t">
+              <a:rot lat="0" lon="0" rev="7200000"/>
+            </a:lightRig>
+          </a:scene3d>
+          <a:sp3d>
+            <a:bevelT w="25400" h="19050"/>
+            <a:contourClr>
+              <a:srgbClr val="FFFFFF"/>
+            </a:contourClr>
+          </a:sp3d>
+        </p:spPr>
+      </p:pic>
     </p:spTree>
     <p:extLst>
       <p:ext uri="{BB962C8B-B14F-4D97-AF65-F5344CB8AC3E}">
-        <p14:creationId xmlns:p14="http://schemas.microsoft.com/office/powerpoint/2010/main" val="616314994"/>
+        <p14:creationId xmlns:p14="http://schemas.microsoft.com/office/powerpoint/2010/main" val="1963697622"/>
+      </p:ext>
+    </p:extLst>
+  </p:cSld>
+  <p:clrMapOvr>
+    <a:masterClrMapping/>
+  </p:clrMapOvr>
+</p:sld>
+</file>
+
+<file path=ppt/slides/slide6.xml><?xml version="1.0" encoding="utf-8"?>
+<p:sld xmlns:a="http://schemas.openxmlformats.org/drawingml/2006/main" xmlns:r="http://schemas.openxmlformats.org/officeDocument/2006/relationships" xmlns:p="http://schemas.openxmlformats.org/presentationml/2006/main">
+  <p:cSld>
+    <p:spTree>
+      <p:nvGrpSpPr>
+        <p:cNvPr id="1" name="">
+          <a:extLst>
+            <a:ext uri="{FF2B5EF4-FFF2-40B4-BE49-F238E27FC236}">
+              <a16:creationId xmlns:a16="http://schemas.microsoft.com/office/drawing/2014/main" id="{BACF932D-5510-E4A4-FA2E-EC700D1A0A69}"/>
+            </a:ext>
+          </a:extLst>
+        </p:cNvPr>
+        <p:cNvGrpSpPr/>
+        <p:nvPr/>
+      </p:nvGrpSpPr>
+      <p:grpSpPr>
+        <a:xfrm>
+          <a:off x="0" y="0"/>
+          <a:ext cx="0" cy="0"/>
+          <a:chOff x="0" y="0"/>
+          <a:chExt cx="0" cy="0"/>
+        </a:xfrm>
+      </p:grpSpPr>
+      <p:sp>
+        <p:nvSpPr>
+          <p:cNvPr id="3" name="TextBox 2">
+            <a:extLst>
+              <a:ext uri="{FF2B5EF4-FFF2-40B4-BE49-F238E27FC236}">
+                <a16:creationId xmlns:a16="http://schemas.microsoft.com/office/drawing/2014/main" id="{229F71AD-DE75-E71E-91EE-B2E21F664100}"/>
+              </a:ext>
+            </a:extLst>
+          </p:cNvPr>
+          <p:cNvSpPr txBox="1"/>
+          <p:nvPr/>
+        </p:nvSpPr>
+        <p:spPr>
+          <a:xfrm>
+            <a:off x="0" y="0"/>
+            <a:ext cx="12192000" cy="355354"/>
+          </a:xfrm>
+          <a:prstGeom prst="rect">
+            <a:avLst/>
+          </a:prstGeom>
+          <a:noFill/>
+        </p:spPr>
+        <p:txBody>
+          <a:bodyPr wrap="square">
+            <a:spAutoFit/>
+          </a:bodyPr>
+          <a:lstStyle/>
+          <a:p>
+            <a:pPr>
+              <a:lnSpc>
+                <a:spcPct val="150000"/>
+              </a:lnSpc>
+              <a:buNone/>
+            </a:pPr>
+            <a:r>
+              <a:rPr kumimoji="0" lang="en-US" altLang="en-US" sz="1300" b="0" i="0" u="none" strike="noStrike" cap="none" normalizeH="0" baseline="0">
+                <a:ln>
+                  <a:noFill/>
+                </a:ln>
+                <a:solidFill>
+                  <a:schemeClr val="tx1"/>
+                </a:solidFill>
+                <a:effectLst/>
+                <a:latin typeface="Arial" panose="020B0604020202020204" pitchFamily="34" charset="0"/>
+              </a:rPr>
+              <a:t>.</a:t>
+            </a:r>
+          </a:p>
+        </p:txBody>
+      </p:sp>
+      <p:pic>
+        <p:nvPicPr>
+          <p:cNvPr id="4" name="Picture 3">
+            <a:extLst>
+              <a:ext uri="{FF2B5EF4-FFF2-40B4-BE49-F238E27FC236}">
+                <a16:creationId xmlns:a16="http://schemas.microsoft.com/office/drawing/2014/main" id="{B99B877A-0779-BCF7-F19C-58B83A110AA0}"/>
+              </a:ext>
+            </a:extLst>
+          </p:cNvPr>
+          <p:cNvPicPr>
+            <a:picLocks noChangeAspect="1"/>
+          </p:cNvPicPr>
+          <p:nvPr/>
+        </p:nvPicPr>
+        <p:blipFill>
+          <a:blip r:embed="rId2"/>
+          <a:stretch>
+            <a:fillRect/>
+          </a:stretch>
+        </p:blipFill>
+        <p:spPr>
+          <a:xfrm>
+            <a:off x="0" y="314116"/>
+            <a:ext cx="12192000" cy="6229768"/>
+          </a:xfrm>
+          <a:prstGeom prst="rect">
+            <a:avLst/>
+          </a:prstGeom>
+          <a:solidFill>
+            <a:srgbClr val="FFFFFF">
+              <a:shade val="85000"/>
+            </a:srgbClr>
+          </a:solidFill>
+          <a:ln w="88900" cap="sq">
+            <a:solidFill>
+              <a:srgbClr val="FFFFFF"/>
+            </a:solidFill>
+            <a:miter lim="800000"/>
+          </a:ln>
+          <a:effectLst>
+            <a:outerShdw blurRad="55000" dist="18000" dir="5400000" algn="tl" rotWithShape="0">
+              <a:srgbClr val="000000">
+                <a:alpha val="40000"/>
+              </a:srgbClr>
+            </a:outerShdw>
+          </a:effectLst>
+          <a:scene3d>
+            <a:camera prst="orthographicFront"/>
+            <a:lightRig rig="twoPt" dir="t">
+              <a:rot lat="0" lon="0" rev="7200000"/>
+            </a:lightRig>
+          </a:scene3d>
+          <a:sp3d>
+            <a:bevelT w="25400" h="19050"/>
+            <a:contourClr>
+              <a:srgbClr val="FFFFFF"/>
+            </a:contourClr>
+          </a:sp3d>
+        </p:spPr>
+      </p:pic>
+    </p:spTree>
+    <p:extLst>
+      <p:ext uri="{BB962C8B-B14F-4D97-AF65-F5344CB8AC3E}">
+        <p14:creationId xmlns:p14="http://schemas.microsoft.com/office/powerpoint/2010/main" val="4202730660"/>
+      </p:ext>
+    </p:extLst>
+  </p:cSld>
+  <p:clrMapOvr>
+    <a:masterClrMapping/>
+  </p:clrMapOvr>
+</p:sld>
+</file>
+
+<file path=ppt/slides/slide7.xml><?xml version="1.0" encoding="utf-8"?>
+<p:sld xmlns:a="http://schemas.openxmlformats.org/drawingml/2006/main" xmlns:r="http://schemas.openxmlformats.org/officeDocument/2006/relationships" xmlns:p="http://schemas.openxmlformats.org/presentationml/2006/main">
+  <p:cSld>
+    <p:spTree>
+      <p:nvGrpSpPr>
+        <p:cNvPr id="1" name="">
+          <a:extLst>
+            <a:ext uri="{FF2B5EF4-FFF2-40B4-BE49-F238E27FC236}">
+              <a16:creationId xmlns:a16="http://schemas.microsoft.com/office/drawing/2014/main" id="{7E6DB73D-AB22-3CA4-AA5E-62F26968A876}"/>
+            </a:ext>
+          </a:extLst>
+        </p:cNvPr>
+        <p:cNvGrpSpPr/>
+        <p:nvPr/>
+      </p:nvGrpSpPr>
+      <p:grpSpPr>
+        <a:xfrm>
+          <a:off x="0" y="0"/>
+          <a:ext cx="0" cy="0"/>
+          <a:chOff x="0" y="0"/>
+          <a:chExt cx="0" cy="0"/>
+        </a:xfrm>
+      </p:grpSpPr>
+      <p:sp>
+        <p:nvSpPr>
+          <p:cNvPr id="3" name="TextBox 2">
+            <a:extLst>
+              <a:ext uri="{FF2B5EF4-FFF2-40B4-BE49-F238E27FC236}">
+                <a16:creationId xmlns:a16="http://schemas.microsoft.com/office/drawing/2014/main" id="{750216CE-73D3-16FE-556E-2C293029C05C}"/>
+              </a:ext>
+            </a:extLst>
+          </p:cNvPr>
+          <p:cNvSpPr txBox="1"/>
+          <p:nvPr/>
+        </p:nvSpPr>
+        <p:spPr>
+          <a:xfrm>
+            <a:off x="0" y="0"/>
+            <a:ext cx="12192000" cy="355354"/>
+          </a:xfrm>
+          <a:prstGeom prst="rect">
+            <a:avLst/>
+          </a:prstGeom>
+          <a:noFill/>
+        </p:spPr>
+        <p:txBody>
+          <a:bodyPr wrap="square">
+            <a:spAutoFit/>
+          </a:bodyPr>
+          <a:lstStyle/>
+          <a:p>
+            <a:pPr>
+              <a:lnSpc>
+                <a:spcPct val="150000"/>
+              </a:lnSpc>
+              <a:buNone/>
+            </a:pPr>
+            <a:r>
+              <a:rPr kumimoji="0" lang="en-US" altLang="en-US" sz="1300" b="0" i="0" u="none" strike="noStrike" cap="none" normalizeH="0" baseline="0">
+                <a:ln>
+                  <a:noFill/>
+                </a:ln>
+                <a:solidFill>
+                  <a:schemeClr val="tx1"/>
+                </a:solidFill>
+                <a:effectLst/>
+                <a:latin typeface="Arial" panose="020B0604020202020204" pitchFamily="34" charset="0"/>
+              </a:rPr>
+              <a:t>.</a:t>
+            </a:r>
+          </a:p>
+        </p:txBody>
+      </p:sp>
+      <p:pic>
+        <p:nvPicPr>
+          <p:cNvPr id="4" name="Picture 3">
+            <a:extLst>
+              <a:ext uri="{FF2B5EF4-FFF2-40B4-BE49-F238E27FC236}">
+                <a16:creationId xmlns:a16="http://schemas.microsoft.com/office/drawing/2014/main" id="{1F2C9C18-041B-4AFF-409E-983CECBECC0B}"/>
+              </a:ext>
+            </a:extLst>
+          </p:cNvPr>
+          <p:cNvPicPr>
+            <a:picLocks noChangeAspect="1"/>
+          </p:cNvPicPr>
+          <p:nvPr/>
+        </p:nvPicPr>
+        <p:blipFill>
+          <a:blip r:embed="rId2"/>
+          <a:stretch>
+            <a:fillRect/>
+          </a:stretch>
+        </p:blipFill>
+        <p:spPr>
+          <a:xfrm>
+            <a:off x="2667000" y="0"/>
+            <a:ext cx="6858000" cy="6858000"/>
+          </a:xfrm>
+          <a:prstGeom prst="rect">
+            <a:avLst/>
+          </a:prstGeom>
+        </p:spPr>
+      </p:pic>
+    </p:spTree>
+    <p:extLst>
+      <p:ext uri="{BB962C8B-B14F-4D97-AF65-F5344CB8AC3E}">
+        <p14:creationId xmlns:p14="http://schemas.microsoft.com/office/powerpoint/2010/main" val="506455953"/>
+      </p:ext>
+    </p:extLst>
+  </p:cSld>
+  <p:clrMapOvr>
+    <a:masterClrMapping/>
+  </p:clrMapOvr>
+</p:sld>
+</file>
+
+<file path=ppt/slides/slide8.xml><?xml version="1.0" encoding="utf-8"?>
+<p:sld xmlns:a="http://schemas.openxmlformats.org/drawingml/2006/main" xmlns:r="http://schemas.openxmlformats.org/officeDocument/2006/relationships" xmlns:p="http://schemas.openxmlformats.org/presentationml/2006/main">
+  <p:cSld>
+    <p:spTree>
+      <p:nvGrpSpPr>
+        <p:cNvPr id="1" name="">
+          <a:extLst>
+            <a:ext uri="{FF2B5EF4-FFF2-40B4-BE49-F238E27FC236}">
+              <a16:creationId xmlns:a16="http://schemas.microsoft.com/office/drawing/2014/main" id="{5A1995D2-24F2-A3A8-4F73-BE4D9E2D1452}"/>
+            </a:ext>
+          </a:extLst>
+        </p:cNvPr>
+        <p:cNvGrpSpPr/>
+        <p:nvPr/>
+      </p:nvGrpSpPr>
+      <p:grpSpPr>
+        <a:xfrm>
+          <a:off x="0" y="0"/>
+          <a:ext cx="0" cy="0"/>
+          <a:chOff x="0" y="0"/>
+          <a:chExt cx="0" cy="0"/>
+        </a:xfrm>
+      </p:grpSpPr>
+      <p:sp>
+        <p:nvSpPr>
+          <p:cNvPr id="3" name="TextBox 2">
+            <a:extLst>
+              <a:ext uri="{FF2B5EF4-FFF2-40B4-BE49-F238E27FC236}">
+                <a16:creationId xmlns:a16="http://schemas.microsoft.com/office/drawing/2014/main" id="{CFBAEEDD-6E80-A289-8BEF-4951825462D6}"/>
+              </a:ext>
+            </a:extLst>
+          </p:cNvPr>
+          <p:cNvSpPr txBox="1"/>
+          <p:nvPr/>
+        </p:nvSpPr>
+        <p:spPr>
+          <a:xfrm>
+            <a:off x="0" y="0"/>
+            <a:ext cx="12192000" cy="355354"/>
+          </a:xfrm>
+          <a:prstGeom prst="rect">
+            <a:avLst/>
+          </a:prstGeom>
+          <a:noFill/>
+        </p:spPr>
+        <p:txBody>
+          <a:bodyPr wrap="square">
+            <a:spAutoFit/>
+          </a:bodyPr>
+          <a:lstStyle/>
+          <a:p>
+            <a:pPr>
+              <a:lnSpc>
+                <a:spcPct val="150000"/>
+              </a:lnSpc>
+              <a:buNone/>
+            </a:pPr>
+            <a:r>
+              <a:rPr kumimoji="0" lang="en-US" altLang="en-US" sz="1300" b="0" i="0" u="none" strike="noStrike" cap="none" normalizeH="0" baseline="0">
+                <a:ln>
+                  <a:noFill/>
+                </a:ln>
+                <a:solidFill>
+                  <a:schemeClr val="tx1"/>
+                </a:solidFill>
+                <a:effectLst/>
+                <a:latin typeface="Arial" panose="020B0604020202020204" pitchFamily="34" charset="0"/>
+              </a:rPr>
+              <a:t>.</a:t>
+            </a:r>
+          </a:p>
+        </p:txBody>
+      </p:sp>
+      <p:pic>
+        <p:nvPicPr>
+          <p:cNvPr id="4" name="Picture 3">
+            <a:extLst>
+              <a:ext uri="{FF2B5EF4-FFF2-40B4-BE49-F238E27FC236}">
+                <a16:creationId xmlns:a16="http://schemas.microsoft.com/office/drawing/2014/main" id="{A56516E7-F478-BA46-41FD-13CF132E1976}"/>
+              </a:ext>
+            </a:extLst>
+          </p:cNvPr>
+          <p:cNvPicPr>
+            <a:picLocks noChangeAspect="1"/>
+          </p:cNvPicPr>
+          <p:nvPr/>
+        </p:nvPicPr>
+        <p:blipFill>
+          <a:blip r:embed="rId2"/>
+          <a:stretch>
+            <a:fillRect/>
+          </a:stretch>
+        </p:blipFill>
+        <p:spPr>
+          <a:xfrm>
+            <a:off x="1840272" y="0"/>
+            <a:ext cx="8511455" cy="6858000"/>
+          </a:xfrm>
+          <a:prstGeom prst="rect">
+            <a:avLst/>
+          </a:prstGeom>
+          <a:solidFill>
+            <a:srgbClr val="FFFFFF">
+              <a:shade val="85000"/>
+            </a:srgbClr>
+          </a:solidFill>
+          <a:ln w="88900" cap="sq">
+            <a:solidFill>
+              <a:srgbClr val="FFFFFF"/>
+            </a:solidFill>
+            <a:miter lim="800000"/>
+          </a:ln>
+          <a:effectLst>
+            <a:outerShdw blurRad="55000" dist="18000" dir="5400000" algn="tl" rotWithShape="0">
+              <a:srgbClr val="000000">
+                <a:alpha val="40000"/>
+              </a:srgbClr>
+            </a:outerShdw>
+          </a:effectLst>
+          <a:scene3d>
+            <a:camera prst="orthographicFront"/>
+            <a:lightRig rig="twoPt" dir="t">
+              <a:rot lat="0" lon="0" rev="7200000"/>
+            </a:lightRig>
+          </a:scene3d>
+          <a:sp3d>
+            <a:bevelT w="25400" h="19050"/>
+            <a:contourClr>
+              <a:srgbClr val="FFFFFF"/>
+            </a:contourClr>
+          </a:sp3d>
+        </p:spPr>
+      </p:pic>
+    </p:spTree>
+    <p:extLst>
+      <p:ext uri="{BB962C8B-B14F-4D97-AF65-F5344CB8AC3E}">
+        <p14:creationId xmlns:p14="http://schemas.microsoft.com/office/powerpoint/2010/main" val="2801465674"/>
+      </p:ext>
+    </p:extLst>
+  </p:cSld>
+  <p:clrMapOvr>
+    <a:masterClrMapping/>
+  </p:clrMapOvr>
+</p:sld>
+</file>
+
+<file path=ppt/slides/slide9.xml><?xml version="1.0" encoding="utf-8"?>
+<p:sld xmlns:a="http://schemas.openxmlformats.org/drawingml/2006/main" xmlns:r="http://schemas.openxmlformats.org/officeDocument/2006/relationships" xmlns:p="http://schemas.openxmlformats.org/presentationml/2006/main">
+  <p:cSld>
+    <p:spTree>
+      <p:nvGrpSpPr>
+        <p:cNvPr id="1" name="">
+          <a:extLst>
+            <a:ext uri="{FF2B5EF4-FFF2-40B4-BE49-F238E27FC236}">
+              <a16:creationId xmlns:a16="http://schemas.microsoft.com/office/drawing/2014/main" id="{857B5264-99BD-A8CE-2105-7618815440FB}"/>
+            </a:ext>
+          </a:extLst>
+        </p:cNvPr>
+        <p:cNvGrpSpPr/>
+        <p:nvPr/>
+      </p:nvGrpSpPr>
+      <p:grpSpPr>
+        <a:xfrm>
+          <a:off x="0" y="0"/>
+          <a:ext cx="0" cy="0"/>
+          <a:chOff x="0" y="0"/>
+          <a:chExt cx="0" cy="0"/>
+        </a:xfrm>
+      </p:grpSpPr>
+      <p:sp>
+        <p:nvSpPr>
+          <p:cNvPr id="3" name="TextBox 2">
+            <a:extLst>
+              <a:ext uri="{FF2B5EF4-FFF2-40B4-BE49-F238E27FC236}">
+                <a16:creationId xmlns:a16="http://schemas.microsoft.com/office/drawing/2014/main" id="{F0D3A6C0-E340-19AF-D9BA-A17F050476F2}"/>
+              </a:ext>
+            </a:extLst>
+          </p:cNvPr>
+          <p:cNvSpPr txBox="1"/>
+          <p:nvPr/>
+        </p:nvSpPr>
+        <p:spPr>
+          <a:xfrm>
+            <a:off x="0" y="0"/>
+            <a:ext cx="12192000" cy="355354"/>
+          </a:xfrm>
+          <a:prstGeom prst="rect">
+            <a:avLst/>
+          </a:prstGeom>
+          <a:noFill/>
+        </p:spPr>
+        <p:txBody>
+          <a:bodyPr wrap="square">
+            <a:spAutoFit/>
+          </a:bodyPr>
+          <a:lstStyle/>
+          <a:p>
+            <a:pPr>
+              <a:lnSpc>
+                <a:spcPct val="150000"/>
+              </a:lnSpc>
+              <a:buNone/>
+            </a:pPr>
+            <a:r>
+              <a:rPr kumimoji="0" lang="en-US" altLang="en-US" sz="1300" b="0" i="0" u="none" strike="noStrike" cap="none" normalizeH="0" baseline="0">
+                <a:ln>
+                  <a:noFill/>
+                </a:ln>
+                <a:solidFill>
+                  <a:schemeClr val="tx1"/>
+                </a:solidFill>
+                <a:effectLst/>
+                <a:latin typeface="Arial" panose="020B0604020202020204" pitchFamily="34" charset="0"/>
+              </a:rPr>
+              <a:t>.</a:t>
+            </a:r>
+          </a:p>
+        </p:txBody>
+      </p:sp>
+      <p:pic>
+        <p:nvPicPr>
+          <p:cNvPr id="4" name="Picture 3">
+            <a:extLst>
+              <a:ext uri="{FF2B5EF4-FFF2-40B4-BE49-F238E27FC236}">
+                <a16:creationId xmlns:a16="http://schemas.microsoft.com/office/drawing/2014/main" id="{EA706273-3B75-B4FC-3B15-AE61AA0A4A7B}"/>
+              </a:ext>
+            </a:extLst>
+          </p:cNvPr>
+          <p:cNvPicPr>
+            <a:picLocks noChangeAspect="1"/>
+          </p:cNvPicPr>
+          <p:nvPr/>
+        </p:nvPicPr>
+        <p:blipFill>
+          <a:blip r:embed="rId2"/>
+          <a:stretch>
+            <a:fillRect/>
+          </a:stretch>
+        </p:blipFill>
+        <p:spPr>
+          <a:xfrm>
+            <a:off x="0" y="1598924"/>
+            <a:ext cx="12192000" cy="3660151"/>
+          </a:xfrm>
+          <a:prstGeom prst="rect">
+            <a:avLst/>
+          </a:prstGeom>
+          <a:solidFill>
+            <a:srgbClr val="FFFFFF">
+              <a:shade val="85000"/>
+            </a:srgbClr>
+          </a:solidFill>
+          <a:ln w="88900" cap="sq">
+            <a:solidFill>
+              <a:srgbClr val="FFFFFF"/>
+            </a:solidFill>
+            <a:miter lim="800000"/>
+          </a:ln>
+          <a:effectLst>
+            <a:outerShdw blurRad="55000" dist="18000" dir="5400000" algn="tl" rotWithShape="0">
+              <a:srgbClr val="000000">
+                <a:alpha val="40000"/>
+              </a:srgbClr>
+            </a:outerShdw>
+          </a:effectLst>
+          <a:scene3d>
+            <a:camera prst="orthographicFront"/>
+            <a:lightRig rig="twoPt" dir="t">
+              <a:rot lat="0" lon="0" rev="7200000"/>
+            </a:lightRig>
+          </a:scene3d>
+          <a:sp3d>
+            <a:bevelT w="25400" h="19050"/>
+            <a:contourClr>
+              <a:srgbClr val="FFFFFF"/>
+            </a:contourClr>
+          </a:sp3d>
+        </p:spPr>
+      </p:pic>
+    </p:spTree>
+    <p:extLst>
+      <p:ext uri="{BB962C8B-B14F-4D97-AF65-F5344CB8AC3E}">
+        <p14:creationId xmlns:p14="http://schemas.microsoft.com/office/powerpoint/2010/main" val="2133608484"/>
       </p:ext>
     </p:extLst>
   </p:cSld>
